--- a/docs/clases/clase_00/clase_00.pptx
+++ b/docs/clases/clase_00/clase_00.pptx
@@ -817,7 +817,7 @@
   <p:cSld>
     <p:spTree>
       <p:nvGrpSpPr>
-        <p:cNvPr id="110" name="Shape 110"/>
+        <p:cNvPr id="111" name="Shape 111"/>
         <p:cNvGrpSpPr/>
         <p:nvPr/>
       </p:nvGrpSpPr>
@@ -831,7 +831,7 @@
       </p:grpSpPr>
       <p:sp>
         <p:nvSpPr>
-          <p:cNvPr id="111" name="Google Shape;111;g2be0ec9c984_0_550:notes"/>
+          <p:cNvPr id="112" name="Google Shape;112;g2be0ec9c984_0_550:notes"/>
           <p:cNvSpPr/>
           <p:nvPr>
             <p:ph idx="2" type="sldImg"/>
@@ -866,7 +866,7 @@
       </p:sp>
       <p:sp>
         <p:nvSpPr>
-          <p:cNvPr id="112" name="Google Shape;112;g2be0ec9c984_0_550:notes"/>
+          <p:cNvPr id="113" name="Google Shape;113;g2be0ec9c984_0_550:notes"/>
           <p:cNvSpPr txBox="1"/>
           <p:nvPr>
             <p:ph idx="1" type="body"/>
@@ -916,7 +916,7 @@
   <p:cSld>
     <p:spTree>
       <p:nvGrpSpPr>
-        <p:cNvPr id="115" name="Shape 115"/>
+        <p:cNvPr id="116" name="Shape 116"/>
         <p:cNvGrpSpPr/>
         <p:nvPr/>
       </p:nvGrpSpPr>
@@ -930,7 +930,7 @@
       </p:grpSpPr>
       <p:sp>
         <p:nvSpPr>
-          <p:cNvPr id="116" name="Google Shape;116;g2be0ec9c984_0_554:notes"/>
+          <p:cNvPr id="117" name="Google Shape;117;g2be0ec9c984_0_554:notes"/>
           <p:cNvSpPr/>
           <p:nvPr>
             <p:ph idx="2" type="sldImg"/>
@@ -965,7 +965,7 @@
       </p:sp>
       <p:sp>
         <p:nvSpPr>
-          <p:cNvPr id="117" name="Google Shape;117;g2be0ec9c984_0_554:notes"/>
+          <p:cNvPr id="118" name="Google Shape;118;g2be0ec9c984_0_554:notes"/>
           <p:cNvSpPr txBox="1"/>
           <p:nvPr>
             <p:ph idx="1" type="body"/>
@@ -1015,7 +1015,7 @@
   <p:cSld>
     <p:spTree>
       <p:nvGrpSpPr>
-        <p:cNvPr id="121" name="Shape 121"/>
+        <p:cNvPr id="122" name="Shape 122"/>
         <p:cNvGrpSpPr/>
         <p:nvPr/>
       </p:nvGrpSpPr>
@@ -1029,7 +1029,7 @@
       </p:grpSpPr>
       <p:sp>
         <p:nvSpPr>
-          <p:cNvPr id="122" name="Google Shape;122;g3db0acc19d7_0_2:notes"/>
+          <p:cNvPr id="123" name="Google Shape;123;g3db0acc19d7_0_2:notes"/>
           <p:cNvSpPr/>
           <p:nvPr>
             <p:ph idx="2" type="sldImg"/>
@@ -1064,7 +1064,7 @@
       </p:sp>
       <p:sp>
         <p:nvSpPr>
-          <p:cNvPr id="123" name="Google Shape;123;g3db0acc19d7_0_2:notes"/>
+          <p:cNvPr id="124" name="Google Shape;124;g3db0acc19d7_0_2:notes"/>
           <p:cNvSpPr txBox="1"/>
           <p:nvPr>
             <p:ph idx="1" type="body"/>
@@ -1708,7 +1708,7 @@
   <p:cSld>
     <p:spTree>
       <p:nvGrpSpPr>
-        <p:cNvPr id="96" name="Shape 96"/>
+        <p:cNvPr id="97" name="Shape 97"/>
         <p:cNvGrpSpPr/>
         <p:nvPr/>
       </p:nvGrpSpPr>
@@ -1722,7 +1722,7 @@
       </p:grpSpPr>
       <p:sp>
         <p:nvSpPr>
-          <p:cNvPr id="97" name="Google Shape;97;g3c1e8b56e60_0_0:notes"/>
+          <p:cNvPr id="98" name="Google Shape;98;g3c1e8b56e60_0_0:notes"/>
           <p:cNvSpPr/>
           <p:nvPr>
             <p:ph idx="2" type="sldImg"/>
@@ -1757,7 +1757,7 @@
       </p:sp>
       <p:sp>
         <p:nvSpPr>
-          <p:cNvPr id="98" name="Google Shape;98;g3c1e8b56e60_0_0:notes"/>
+          <p:cNvPr id="99" name="Google Shape;99;g3c1e8b56e60_0_0:notes"/>
           <p:cNvSpPr txBox="1"/>
           <p:nvPr>
             <p:ph idx="1" type="body"/>
@@ -1807,7 +1807,7 @@
   <p:cSld>
     <p:spTree>
       <p:nvGrpSpPr>
-        <p:cNvPr id="103" name="Shape 103"/>
+        <p:cNvPr id="104" name="Shape 104"/>
         <p:cNvGrpSpPr/>
         <p:nvPr/>
       </p:nvGrpSpPr>
@@ -1821,7 +1821,7 @@
       </p:grpSpPr>
       <p:sp>
         <p:nvSpPr>
-          <p:cNvPr id="104" name="Google Shape;104;g2be0ec9c984_0_534:notes"/>
+          <p:cNvPr id="105" name="Google Shape;105;g2be0ec9c984_0_534:notes"/>
           <p:cNvSpPr/>
           <p:nvPr>
             <p:ph idx="2" type="sldImg"/>
@@ -1856,7 +1856,7 @@
       </p:sp>
       <p:sp>
         <p:nvSpPr>
-          <p:cNvPr id="105" name="Google Shape;105;g2be0ec9c984_0_534:notes"/>
+          <p:cNvPr id="106" name="Google Shape;106;g2be0ec9c984_0_534:notes"/>
           <p:cNvSpPr txBox="1"/>
           <p:nvPr>
             <p:ph idx="1" type="body"/>
@@ -7081,7 +7081,7 @@
     </p:bg>
     <p:spTree>
       <p:nvGrpSpPr>
-        <p:cNvPr id="113" name="Shape 113"/>
+        <p:cNvPr id="114" name="Shape 114"/>
         <p:cNvGrpSpPr/>
         <p:nvPr/>
       </p:nvGrpSpPr>
@@ -7095,7 +7095,7 @@
       </p:grpSpPr>
       <p:sp>
         <p:nvSpPr>
-          <p:cNvPr id="114" name="Google Shape;114;p22"/>
+          <p:cNvPr id="115" name="Google Shape;115;p22"/>
           <p:cNvSpPr txBox="1"/>
           <p:nvPr>
             <p:ph type="title"/>
@@ -7131,15 +7131,7 @@
                   <a:schemeClr val="lt2"/>
                 </a:solidFill>
               </a:rPr>
-              <a:t>3</a:t>
-            </a:r>
-            <a:r>
-              <a:rPr lang="es">
-                <a:solidFill>
-                  <a:schemeClr val="lt2"/>
-                </a:solidFill>
-              </a:rPr>
-              <a:t>. Lectura introductoria</a:t>
+              <a:t>Lectura introductoria</a:t>
             </a:r>
             <a:endParaRPr>
               <a:solidFill>
@@ -7162,7 +7154,7 @@
   <p:cSld>
     <p:spTree>
       <p:nvGrpSpPr>
-        <p:cNvPr id="118" name="Shape 118"/>
+        <p:cNvPr id="119" name="Shape 119"/>
         <p:cNvGrpSpPr/>
         <p:nvPr/>
       </p:nvGrpSpPr>
@@ -7176,7 +7168,7 @@
       </p:grpSpPr>
       <p:sp>
         <p:nvSpPr>
-          <p:cNvPr id="119" name="Google Shape;119;p23"/>
+          <p:cNvPr id="120" name="Google Shape;120;p23"/>
           <p:cNvSpPr txBox="1"/>
           <p:nvPr>
             <p:ph type="title"/>
@@ -7216,7 +7208,7 @@
       </p:sp>
       <p:sp>
         <p:nvSpPr>
-          <p:cNvPr id="120" name="Google Shape;120;p23"/>
+          <p:cNvPr id="121" name="Google Shape;121;p23"/>
           <p:cNvSpPr txBox="1"/>
           <p:nvPr>
             <p:ph idx="1" type="body"/>
@@ -7267,13 +7259,7 @@
               <a:buNone/>
             </a:pPr>
             <a:r>
-              <a:rPr lang="es">
-                <a:latin typeface="EB Garamond"/>
-                <a:ea typeface="EB Garamond"/>
-                <a:cs typeface="EB Garamond"/>
-                <a:sym typeface="EB Garamond"/>
-              </a:rPr>
-              <a:t>La lectura que nos acompañará en la primera unidad del curso es:</a:t>
+              <a:t/>
             </a:r>
             <a:endParaRPr>
               <a:latin typeface="EB Garamond"/>
@@ -7298,13 +7284,8 @@
               <a:buNone/>
             </a:pPr>
             <a:r>
-              <a:rPr lang="es">
-                <a:latin typeface="EB Garamond"/>
-                <a:ea typeface="EB Garamond"/>
-                <a:cs typeface="EB Garamond"/>
-                <a:sym typeface="EB Garamond"/>
-              </a:rPr>
-              <a:t>Ritchey, Ferris (2002). Estadística para las Ciencias Sociales. El potencial de la imaginación estadística. McGraw-Hill, México. </a:t>
+              <a:rPr lang="es"/>
+              <a:t>Ritchey, F. (2008). Estadística para las ciencias sociales: El potencial de la imaginación estadística (2.ª ed.). McGraw-Hill.</a:t>
             </a:r>
             <a:endParaRPr>
               <a:latin typeface="EB Garamond"/>
@@ -7330,7 +7311,7 @@
                 <a:cs typeface="EB Garamond"/>
                 <a:sym typeface="EB Garamond"/>
               </a:rPr>
-              <a:t>Cap. 1. “La imaginación estadística” (páginas 1-35)</a:t>
+              <a:t>Cap. 1. “La imaginación estadística” </a:t>
             </a:r>
             <a:endParaRPr>
               <a:latin typeface="EB Garamond"/>
@@ -7369,7 +7350,7 @@
   <p:cSld>
     <p:spTree>
       <p:nvGrpSpPr>
-        <p:cNvPr id="124" name="Shape 124"/>
+        <p:cNvPr id="125" name="Shape 125"/>
         <p:cNvGrpSpPr/>
         <p:nvPr/>
       </p:nvGrpSpPr>
@@ -7383,7 +7364,7 @@
       </p:grpSpPr>
       <p:sp>
         <p:nvSpPr>
-          <p:cNvPr id="125" name="Google Shape;125;p24"/>
+          <p:cNvPr id="126" name="Google Shape;126;p24"/>
           <p:cNvSpPr txBox="1"/>
           <p:nvPr>
             <p:ph type="ctrTitle"/>
@@ -7459,7 +7440,7 @@
       </p:sp>
       <p:sp>
         <p:nvSpPr>
-          <p:cNvPr id="126" name="Google Shape;126;p24"/>
+          <p:cNvPr id="127" name="Google Shape;127;p24"/>
           <p:cNvSpPr txBox="1"/>
           <p:nvPr>
             <p:ph idx="1" type="subTitle"/>
@@ -7535,7 +7516,7 @@
       </p:sp>
       <p:sp>
         <p:nvSpPr>
-          <p:cNvPr id="127" name="Google Shape;127;p24"/>
+          <p:cNvPr id="128" name="Google Shape;128;p24"/>
           <p:cNvSpPr txBox="1"/>
           <p:nvPr>
             <p:ph idx="1" type="subTitle"/>
@@ -7673,7 +7654,7 @@
       </p:sp>
       <p:sp>
         <p:nvSpPr>
-          <p:cNvPr id="128" name="Google Shape;128;p24"/>
+          <p:cNvPr id="129" name="Google Shape;129;p24"/>
           <p:cNvSpPr txBox="1"/>
           <p:nvPr>
             <p:ph idx="1" type="subTitle"/>
@@ -7805,7 +7786,7 @@
       </p:sp>
       <p:pic>
         <p:nvPicPr>
-          <p:cNvPr id="129" name="Google Shape;129;p24" title="Logo_Universidad_Diego_Portales.png"/>
+          <p:cNvPr id="130" name="Google Shape;130;p24" title="Logo_Universidad_Diego_Portales.png"/>
           <p:cNvPicPr preferRelativeResize="0"/>
           <p:nvPr/>
         </p:nvPicPr>
@@ -8619,7 +8600,7 @@
             </a:pPr>
             <a:r>
               <a:rPr lang="es"/>
-              <a:t>Unidades de aprendizaje</a:t>
+              <a:t>Unidades</a:t>
             </a:r>
             <a:endParaRPr/>
           </a:p>
@@ -8662,11 +8643,18 @@
               <a:buNone/>
             </a:pPr>
             <a:r>
-              <a:rPr b="1" lang="es"/>
+              <a:rPr b="1" lang="es">
+                <a:highlight>
+                  <a:srgbClr val="A2C4C9"/>
+                </a:highlight>
+              </a:rPr>
               <a:t>1</a:t>
             </a:r>
             <a:r>
               <a:rPr b="1" lang="es">
+                <a:highlight>
+                  <a:srgbClr val="A2C4C9"/>
+                </a:highlight>
                 <a:latin typeface="EB Garamond"/>
                 <a:ea typeface="EB Garamond"/>
                 <a:cs typeface="EB Garamond"/>
@@ -8675,8 +8663,215 @@
               <a:t>. Introducción a</a:t>
             </a:r>
             <a:r>
-              <a:rPr b="1" lang="es"/>
+              <a:rPr b="1" lang="es">
+                <a:highlight>
+                  <a:srgbClr val="A2C4C9"/>
+                </a:highlight>
+              </a:rPr>
               <a:t>l uso de R</a:t>
+            </a:r>
+            <a:endParaRPr b="1">
+              <a:highlight>
+                <a:srgbClr val="A2C4C9"/>
+              </a:highlight>
+              <a:latin typeface="EB Garamond"/>
+              <a:ea typeface="EB Garamond"/>
+              <a:cs typeface="EB Garamond"/>
+              <a:sym typeface="EB Garamond"/>
+            </a:endParaRPr>
+          </a:p>
+          <a:p>
+            <a:pPr indent="0" lvl="0" marL="0" marR="25400" rtl="0" algn="just">
+              <a:lnSpc>
+                <a:spcPct val="100000"/>
+              </a:lnSpc>
+              <a:spcBef>
+                <a:spcPts val="0"/>
+              </a:spcBef>
+              <a:spcAft>
+                <a:spcPts val="0"/>
+              </a:spcAft>
+              <a:buNone/>
+            </a:pPr>
+            <a:r>
+              <a:rPr lang="es"/>
+              <a:t>1.1.	Introducción a la Ciencia Abierta </a:t>
+            </a:r>
+            <a:endParaRPr/>
+          </a:p>
+          <a:p>
+            <a:pPr indent="0" lvl="0" marL="0" marR="25400" rtl="0" algn="just">
+              <a:lnSpc>
+                <a:spcPct val="100000"/>
+              </a:lnSpc>
+              <a:spcBef>
+                <a:spcPts val="0"/>
+              </a:spcBef>
+              <a:spcAft>
+                <a:spcPts val="0"/>
+              </a:spcAft>
+              <a:buNone/>
+            </a:pPr>
+            <a:r>
+              <a:rPr lang="es"/>
+              <a:t>1.2.	Flujo de trabajo reproducible</a:t>
+            </a:r>
+            <a:endParaRPr/>
+          </a:p>
+          <a:p>
+            <a:pPr indent="0" lvl="0" marL="0" marR="25400" rtl="0" algn="just">
+              <a:lnSpc>
+                <a:spcPct val="100000"/>
+              </a:lnSpc>
+              <a:spcBef>
+                <a:spcPts val="0"/>
+              </a:spcBef>
+              <a:spcAft>
+                <a:spcPts val="0"/>
+              </a:spcAft>
+              <a:buNone/>
+            </a:pPr>
+            <a:r>
+              <a:rPr lang="es"/>
+              <a:t>1.3.	Introducción al software y lenguaje de programación R</a:t>
+            </a:r>
+            <a:endParaRPr/>
+          </a:p>
+          <a:p>
+            <a:pPr indent="0" lvl="0" marL="0" marR="25400" rtl="0" algn="just">
+              <a:lnSpc>
+                <a:spcPct val="100000"/>
+              </a:lnSpc>
+              <a:spcBef>
+                <a:spcPts val="0"/>
+              </a:spcBef>
+              <a:spcAft>
+                <a:spcPts val="0"/>
+              </a:spcAft>
+              <a:buNone/>
+            </a:pPr>
+            <a:r>
+              <a:rPr lang="es"/>
+              <a:t>1.4.	REnvironment e interfaz RStudio</a:t>
+            </a:r>
+            <a:endParaRPr/>
+          </a:p>
+          <a:p>
+            <a:pPr indent="0" lvl="0" marL="0" marR="25400" rtl="0" algn="just">
+              <a:lnSpc>
+                <a:spcPct val="100000"/>
+              </a:lnSpc>
+              <a:spcBef>
+                <a:spcPts val="0"/>
+              </a:spcBef>
+              <a:spcAft>
+                <a:spcPts val="0"/>
+              </a:spcAft>
+              <a:buNone/>
+            </a:pPr>
+            <a:r>
+              <a:rPr lang="es"/>
+              <a:t>1.5.	Lógica del lenguaje R</a:t>
+            </a:r>
+            <a:endParaRPr/>
+          </a:p>
+          <a:p>
+            <a:pPr indent="0" lvl="0" marL="0" marR="25400" rtl="0" algn="just">
+              <a:lnSpc>
+                <a:spcPct val="100000"/>
+              </a:lnSpc>
+              <a:spcBef>
+                <a:spcPts val="0"/>
+              </a:spcBef>
+              <a:spcAft>
+                <a:spcPts val="0"/>
+              </a:spcAft>
+              <a:buNone/>
+            </a:pPr>
+            <a:r>
+              <a:rPr lang="es"/>
+              <a:t>1.6.	Procesamiento de datos</a:t>
+            </a:r>
+            <a:endParaRPr/>
+          </a:p>
+          <a:p>
+            <a:pPr indent="0" lvl="0" marL="0" marR="25400" rtl="0" algn="just">
+              <a:lnSpc>
+                <a:spcPct val="100000"/>
+              </a:lnSpc>
+              <a:spcBef>
+                <a:spcPts val="0"/>
+              </a:spcBef>
+              <a:spcAft>
+                <a:spcPts val="0"/>
+              </a:spcAft>
+              <a:buNone/>
+            </a:pPr>
+            <a:r>
+              <a:rPr lang="es"/>
+              <a:t>1.7.	Introducción a Quarto y documentos dinámicos</a:t>
+            </a:r>
+            <a:endParaRPr/>
+          </a:p>
+          <a:p>
+            <a:pPr indent="0" lvl="0" marL="0" marR="25400" rtl="0" algn="just">
+              <a:lnSpc>
+                <a:spcPct val="115000"/>
+              </a:lnSpc>
+              <a:spcBef>
+                <a:spcPts val="0"/>
+              </a:spcBef>
+              <a:spcAft>
+                <a:spcPts val="0"/>
+              </a:spcAft>
+              <a:buNone/>
+            </a:pPr>
+            <a:r>
+              <a:t/>
+            </a:r>
+            <a:endParaRPr/>
+          </a:p>
+          <a:p>
+            <a:pPr indent="0" lvl="0" marL="0" rtl="0" algn="l">
+              <a:lnSpc>
+                <a:spcPct val="115000"/>
+              </a:lnSpc>
+              <a:spcBef>
+                <a:spcPts val="1200"/>
+              </a:spcBef>
+              <a:spcAft>
+                <a:spcPts val="0"/>
+              </a:spcAft>
+              <a:buSzPts val="605"/>
+              <a:buNone/>
+            </a:pPr>
+            <a:r>
+              <a:rPr b="1" lang="es">
+                <a:highlight>
+                  <a:srgbClr val="A2C4C9"/>
+                </a:highlight>
+              </a:rPr>
+              <a:t>2</a:t>
+            </a:r>
+            <a:r>
+              <a:rPr b="1" lang="es">
+                <a:highlight>
+                  <a:srgbClr val="A2C4C9"/>
+                </a:highlight>
+                <a:latin typeface="EB Garamond"/>
+                <a:ea typeface="EB Garamond"/>
+                <a:cs typeface="EB Garamond"/>
+                <a:sym typeface="EB Garamond"/>
+              </a:rPr>
+              <a:t>. </a:t>
+            </a:r>
+            <a:r>
+              <a:rPr b="1" lang="es">
+                <a:highlight>
+                  <a:srgbClr val="A2C4C9"/>
+                </a:highlight>
+              </a:rPr>
+              <a:t>Introducción a la Estadística</a:t>
             </a:r>
             <a:endParaRPr b="1">
               <a:latin typeface="EB Garamond"/>
@@ -8687,106 +8882,106 @@
           </a:p>
           <a:p>
             <a:pPr indent="0" lvl="0" marL="0" rtl="0" algn="l">
-              <a:lnSpc>
-                <a:spcPct val="115000"/>
-              </a:lnSpc>
-              <a:spcBef>
-                <a:spcPts val="0"/>
-              </a:spcBef>
-              <a:spcAft>
-                <a:spcPts val="0"/>
-              </a:spcAft>
-              <a:buSzPts val="605"/>
+              <a:spcBef>
+                <a:spcPts val="0"/>
+              </a:spcBef>
+              <a:spcAft>
+                <a:spcPts val="0"/>
+              </a:spcAft>
+              <a:buClr>
+                <a:schemeClr val="dk1"/>
+              </a:buClr>
+              <a:buSzPts val="1100"/>
+              <a:buFont typeface="Arial"/>
               <a:buNone/>
             </a:pPr>
             <a:r>
               <a:rPr lang="es"/>
-              <a:t>a.	Introducción a la Ciencia Abierta y lógica de investigación reproducible</a:t>
+              <a:t>2.1. Noción de distribución</a:t>
             </a:r>
             <a:endParaRPr/>
           </a:p>
           <a:p>
             <a:pPr indent="0" lvl="0" marL="0" rtl="0" algn="l">
-              <a:lnSpc>
-                <a:spcPct val="115000"/>
-              </a:lnSpc>
-              <a:spcBef>
-                <a:spcPts val="0"/>
-              </a:spcBef>
-              <a:spcAft>
-                <a:spcPts val="0"/>
-              </a:spcAft>
-              <a:buSzPts val="605"/>
+              <a:spcBef>
+                <a:spcPts val="0"/>
+              </a:spcBef>
+              <a:spcAft>
+                <a:spcPts val="0"/>
+              </a:spcAft>
+              <a:buClr>
+                <a:schemeClr val="dk1"/>
+              </a:buClr>
+              <a:buSzPts val="1100"/>
+              <a:buFont typeface="Arial"/>
               <a:buNone/>
             </a:pPr>
             <a:r>
               <a:rPr lang="es"/>
-              <a:t>b.	Introducción al software y lenguaje de programación R</a:t>
+              <a:t>2.2. Introducción a la estadística descriptiva</a:t>
             </a:r>
             <a:endParaRPr/>
           </a:p>
           <a:p>
             <a:pPr indent="0" lvl="0" marL="0" rtl="0" algn="l">
-              <a:lnSpc>
-                <a:spcPct val="115000"/>
-              </a:lnSpc>
-              <a:spcBef>
-                <a:spcPts val="0"/>
-              </a:spcBef>
-              <a:spcAft>
-                <a:spcPts val="0"/>
-              </a:spcAft>
-              <a:buSzPts val="605"/>
+              <a:spcBef>
+                <a:spcPts val="0"/>
+              </a:spcBef>
+              <a:spcAft>
+                <a:spcPts val="0"/>
+              </a:spcAft>
+              <a:buClr>
+                <a:schemeClr val="dk1"/>
+              </a:buClr>
+              <a:buSzPts val="1100"/>
+              <a:buFont typeface="Arial"/>
               <a:buNone/>
             </a:pPr>
             <a:r>
-              <a:t/>
+              <a:rPr lang="es"/>
+              <a:t>2.3. Tipos de análisis estadístico univariado</a:t>
             </a:r>
             <a:endParaRPr/>
           </a:p>
           <a:p>
             <a:pPr indent="0" lvl="0" marL="0" rtl="0" algn="l">
-              <a:lnSpc>
-                <a:spcPct val="115000"/>
-              </a:lnSpc>
-              <a:spcBef>
-                <a:spcPts val="0"/>
-              </a:spcBef>
-              <a:spcAft>
-                <a:spcPts val="0"/>
-              </a:spcAft>
-              <a:buSzPts val="605"/>
+              <a:spcBef>
+                <a:spcPts val="0"/>
+              </a:spcBef>
+              <a:spcAft>
+                <a:spcPts val="0"/>
+              </a:spcAft>
+              <a:buClr>
+                <a:schemeClr val="dk1"/>
+              </a:buClr>
+              <a:buSzPts val="1100"/>
+              <a:buFont typeface="Arial"/>
               <a:buNone/>
             </a:pPr>
             <a:r>
               <a:rPr lang="es"/>
-              <a:t>1</a:t>
-            </a:r>
-            <a:r>
-              <a:rPr lang="es">
-                <a:latin typeface="EB Garamond"/>
-                <a:ea typeface="EB Garamond"/>
-                <a:cs typeface="EB Garamond"/>
-                <a:sym typeface="EB Garamond"/>
-              </a:rPr>
-              <a:t>.3. </a:t>
-            </a:r>
+              <a:t>2.4. Tipos de análisis estadístico bivariado</a:t>
+            </a:r>
+            <a:endParaRPr/>
+          </a:p>
+          <a:p>
+            <a:pPr indent="0" lvl="0" marL="0" rtl="0" algn="l">
+              <a:spcBef>
+                <a:spcPts val="0"/>
+              </a:spcBef>
+              <a:spcAft>
+                <a:spcPts val="0"/>
+              </a:spcAft>
+              <a:buClr>
+                <a:schemeClr val="dk1"/>
+              </a:buClr>
+              <a:buSzPts val="1100"/>
+              <a:buFont typeface="Arial"/>
+              <a:buNone/>
+            </a:pPr>
             <a:r>
               <a:rPr lang="es"/>
-              <a:t>P</a:t>
-            </a:r>
-            <a:r>
-              <a:rPr lang="es">
-                <a:latin typeface="EB Garamond"/>
-                <a:ea typeface="EB Garamond"/>
-                <a:cs typeface="EB Garamond"/>
-                <a:sym typeface="EB Garamond"/>
-              </a:rPr>
-              <a:t>roblema de Investigación Cuantitativ</a:t>
-            </a:r>
-            <a:r>
-              <a:rPr lang="es"/>
-              <a:t>o</a:t>
+              <a:t>2.5. Tipos de gráficos y formas de visualización</a:t>
             </a:r>
             <a:endParaRPr/>
           </a:p>
@@ -8801,223 +8996,11 @@
               <a:spcAft>
                 <a:spcPts val="0"/>
               </a:spcAft>
+              <a:buSzPts val="1100"/>
               <a:buNone/>
             </a:pPr>
             <a:r>
-              <a:rPr lang="es"/>
-              <a:t>1</a:t>
-            </a:r>
-            <a:r>
-              <a:rPr lang="es">
-                <a:latin typeface="EB Garamond"/>
-                <a:ea typeface="EB Garamond"/>
-                <a:cs typeface="EB Garamond"/>
-                <a:sym typeface="EB Garamond"/>
-              </a:rPr>
-              <a:t>.4. Conceptualización y operacionalización</a:t>
-            </a:r>
-            <a:endParaRPr>
-              <a:latin typeface="EB Garamond"/>
-              <a:ea typeface="EB Garamond"/>
-              <a:cs typeface="EB Garamond"/>
-              <a:sym typeface="EB Garamond"/>
-            </a:endParaRPr>
-          </a:p>
-          <a:p>
-            <a:pPr indent="0" lvl="0" marL="0" marR="25400" rtl="0" algn="just">
-              <a:lnSpc>
-                <a:spcPct val="115000"/>
-              </a:lnSpc>
-              <a:spcBef>
-                <a:spcPts val="1200"/>
-              </a:spcBef>
-              <a:spcAft>
-                <a:spcPts val="0"/>
-              </a:spcAft>
-              <a:buNone/>
-            </a:pPr>
-            <a:r>
               <a:t/>
-            </a:r>
-            <a:endParaRPr/>
-          </a:p>
-          <a:p>
-            <a:pPr indent="0" lvl="0" marL="0" marR="25400" rtl="0" algn="just">
-              <a:lnSpc>
-                <a:spcPct val="115000"/>
-              </a:lnSpc>
-              <a:spcBef>
-                <a:spcPts val="1200"/>
-              </a:spcBef>
-              <a:spcAft>
-                <a:spcPts val="0"/>
-              </a:spcAft>
-              <a:buNone/>
-            </a:pPr>
-            <a:r>
-              <a:t/>
-            </a:r>
-            <a:endParaRPr/>
-          </a:p>
-          <a:p>
-            <a:pPr indent="0" lvl="0" marL="0" rtl="0" algn="l">
-              <a:lnSpc>
-                <a:spcPct val="115000"/>
-              </a:lnSpc>
-              <a:spcBef>
-                <a:spcPts val="1200"/>
-              </a:spcBef>
-              <a:spcAft>
-                <a:spcPts val="0"/>
-              </a:spcAft>
-              <a:buSzPts val="605"/>
-              <a:buNone/>
-            </a:pPr>
-            <a:r>
-              <a:rPr b="1" lang="es"/>
-              <a:t>2</a:t>
-            </a:r>
-            <a:r>
-              <a:rPr b="1" lang="es">
-                <a:latin typeface="EB Garamond"/>
-                <a:ea typeface="EB Garamond"/>
-                <a:cs typeface="EB Garamond"/>
-                <a:sym typeface="EB Garamond"/>
-              </a:rPr>
-              <a:t>. Elaboración de la matriz de datos</a:t>
-            </a:r>
-            <a:endParaRPr b="1">
-              <a:latin typeface="EB Garamond"/>
-              <a:ea typeface="EB Garamond"/>
-              <a:cs typeface="EB Garamond"/>
-              <a:sym typeface="EB Garamond"/>
-            </a:endParaRPr>
-          </a:p>
-          <a:p>
-            <a:pPr indent="0" lvl="0" marL="0" marR="25400" rtl="0" algn="just">
-              <a:lnSpc>
-                <a:spcPct val="115000"/>
-              </a:lnSpc>
-              <a:spcBef>
-                <a:spcPts val="0"/>
-              </a:spcBef>
-              <a:spcAft>
-                <a:spcPts val="0"/>
-              </a:spcAft>
-              <a:buSzPts val="1100"/>
-              <a:buNone/>
-            </a:pPr>
-            <a:r>
-              <a:rPr lang="es"/>
-              <a:t>2.1. Nociones de Universo, Población y Muestra</a:t>
-            </a:r>
-            <a:endParaRPr/>
-          </a:p>
-          <a:p>
-            <a:pPr indent="0" lvl="0" marL="0" marR="25400" rtl="0" algn="just">
-              <a:lnSpc>
-                <a:spcPct val="115000"/>
-              </a:lnSpc>
-              <a:spcBef>
-                <a:spcPts val="0"/>
-              </a:spcBef>
-              <a:spcAft>
-                <a:spcPts val="0"/>
-              </a:spcAft>
-              <a:buSzPts val="1100"/>
-              <a:buNone/>
-            </a:pPr>
-            <a:r>
-              <a:rPr lang="es"/>
-              <a:t>2.2. Tipos de muestreo</a:t>
-            </a:r>
-            <a:endParaRPr/>
-          </a:p>
-          <a:p>
-            <a:pPr indent="0" lvl="0" marL="0" marR="25400" rtl="0" algn="just">
-              <a:spcBef>
-                <a:spcPts val="0"/>
-              </a:spcBef>
-              <a:spcAft>
-                <a:spcPts val="0"/>
-              </a:spcAft>
-              <a:buClr>
-                <a:schemeClr val="dk1"/>
-              </a:buClr>
-              <a:buSzPts val="1100"/>
-              <a:buFont typeface="Arial"/>
-              <a:buNone/>
-            </a:pPr>
-            <a:r>
-              <a:rPr lang="es"/>
-              <a:t>2.3. Técnicas de recolección y procesamiento de datos</a:t>
-            </a:r>
-            <a:endParaRPr/>
-          </a:p>
-          <a:p>
-            <a:pPr indent="0" lvl="0" marL="0" marR="25400" rtl="0" algn="just">
-              <a:lnSpc>
-                <a:spcPct val="115000"/>
-              </a:lnSpc>
-              <a:spcBef>
-                <a:spcPts val="0"/>
-              </a:spcBef>
-              <a:spcAft>
-                <a:spcPts val="0"/>
-              </a:spcAft>
-              <a:buSzPts val="1100"/>
-              <a:buNone/>
-            </a:pPr>
-            <a:r>
-              <a:rPr lang="es"/>
-              <a:t>2</a:t>
-            </a:r>
-            <a:r>
-              <a:rPr lang="es">
-                <a:latin typeface="EB Garamond"/>
-                <a:ea typeface="EB Garamond"/>
-                <a:cs typeface="EB Garamond"/>
-                <a:sym typeface="EB Garamond"/>
-              </a:rPr>
-              <a:t>.</a:t>
-            </a:r>
-            <a:r>
-              <a:rPr lang="es"/>
-              <a:t>4</a:t>
-            </a:r>
-            <a:r>
-              <a:rPr lang="es">
-                <a:latin typeface="EB Garamond"/>
-                <a:ea typeface="EB Garamond"/>
-                <a:cs typeface="EB Garamond"/>
-                <a:sym typeface="EB Garamond"/>
-              </a:rPr>
-              <a:t>. Elaboración de una matriz de datos y su libro de códigos</a:t>
-            </a:r>
-            <a:endParaRPr>
-              <a:latin typeface="EB Garamond"/>
-              <a:ea typeface="EB Garamond"/>
-              <a:cs typeface="EB Garamond"/>
-              <a:sym typeface="EB Garamond"/>
-            </a:endParaRPr>
-          </a:p>
-          <a:p>
-            <a:pPr indent="0" lvl="0" marL="0" marR="25400" rtl="0" algn="just">
-              <a:lnSpc>
-                <a:spcPct val="115000"/>
-              </a:lnSpc>
-              <a:spcBef>
-                <a:spcPts val="0"/>
-              </a:spcBef>
-              <a:spcAft>
-                <a:spcPts val="0"/>
-              </a:spcAft>
-              <a:buSzPts val="1100"/>
-              <a:buNone/>
-            </a:pPr>
-            <a:r>
-              <a:rPr lang="es"/>
-              <a:t>2.5. Noción de distribución</a:t>
             </a:r>
             <a:endParaRPr/>
           </a:p>
@@ -9140,17 +9123,239 @@
               <a:buNone/>
             </a:pPr>
             <a:r>
-              <a:rPr b="1" lang="es"/>
+              <a:rPr b="1" lang="es">
+                <a:highlight>
+                  <a:srgbClr val="A2C4C9"/>
+                </a:highlight>
+              </a:rPr>
               <a:t>3</a:t>
             </a:r>
             <a:r>
               <a:rPr b="1" lang="es">
+                <a:highlight>
+                  <a:srgbClr val="A2C4C9"/>
+                </a:highlight>
+              </a:rPr>
+              <a:t>. Estadística descriptiva</a:t>
+            </a:r>
+            <a:r>
+              <a:rPr b="1" lang="es">
+                <a:highlight>
+                  <a:srgbClr val="A2C4C9"/>
+                </a:highlight>
                 <a:latin typeface="EB Garamond"/>
                 <a:ea typeface="EB Garamond"/>
                 <a:cs typeface="EB Garamond"/>
                 <a:sym typeface="EB Garamond"/>
               </a:rPr>
-              <a:t>. Análisis de datos descriptivo univariado</a:t>
+              <a:t> univariad</a:t>
+            </a:r>
+            <a:r>
+              <a:rPr b="1" lang="es">
+                <a:highlight>
+                  <a:srgbClr val="A2C4C9"/>
+                </a:highlight>
+              </a:rPr>
+              <a:t>a</a:t>
+            </a:r>
+            <a:endParaRPr b="1">
+              <a:highlight>
+                <a:srgbClr val="A2C4C9"/>
+              </a:highlight>
+              <a:latin typeface="EB Garamond"/>
+              <a:ea typeface="EB Garamond"/>
+              <a:cs typeface="EB Garamond"/>
+              <a:sym typeface="EB Garamond"/>
+            </a:endParaRPr>
+          </a:p>
+          <a:p>
+            <a:pPr indent="0" lvl="0" marL="0" rtl="0" algn="l">
+              <a:spcBef>
+                <a:spcPts val="0"/>
+              </a:spcBef>
+              <a:spcAft>
+                <a:spcPts val="0"/>
+              </a:spcAft>
+              <a:buClr>
+                <a:schemeClr val="dk1"/>
+              </a:buClr>
+              <a:buSzPts val="605"/>
+              <a:buFont typeface="Arial"/>
+              <a:buNone/>
+            </a:pPr>
+            <a:r>
+              <a:rPr lang="es"/>
+              <a:t>3.1.	Frecuencias</a:t>
+            </a:r>
+            <a:endParaRPr/>
+          </a:p>
+          <a:p>
+            <a:pPr indent="0" lvl="0" marL="0" rtl="0" algn="l">
+              <a:spcBef>
+                <a:spcPts val="0"/>
+              </a:spcBef>
+              <a:spcAft>
+                <a:spcPts val="0"/>
+              </a:spcAft>
+              <a:buClr>
+                <a:schemeClr val="dk1"/>
+              </a:buClr>
+              <a:buSzPts val="605"/>
+              <a:buFont typeface="Arial"/>
+              <a:buNone/>
+            </a:pPr>
+            <a:r>
+              <a:rPr lang="es"/>
+              <a:t>3.2.	Medidas de tendencia central</a:t>
+            </a:r>
+            <a:endParaRPr/>
+          </a:p>
+          <a:p>
+            <a:pPr indent="0" lvl="0" marL="0" rtl="0" algn="l">
+              <a:spcBef>
+                <a:spcPts val="0"/>
+              </a:spcBef>
+              <a:spcAft>
+                <a:spcPts val="0"/>
+              </a:spcAft>
+              <a:buClr>
+                <a:schemeClr val="dk1"/>
+              </a:buClr>
+              <a:buSzPts val="605"/>
+              <a:buFont typeface="Arial"/>
+              <a:buNone/>
+            </a:pPr>
+            <a:r>
+              <a:rPr lang="es"/>
+              <a:t>3.3.	Medidas de dispersión</a:t>
+            </a:r>
+            <a:endParaRPr/>
+          </a:p>
+          <a:p>
+            <a:pPr indent="0" lvl="0" marL="0" rtl="0" algn="l">
+              <a:spcBef>
+                <a:spcPts val="0"/>
+              </a:spcBef>
+              <a:spcAft>
+                <a:spcPts val="0"/>
+              </a:spcAft>
+              <a:buClr>
+                <a:schemeClr val="dk1"/>
+              </a:buClr>
+              <a:buSzPts val="605"/>
+              <a:buFont typeface="Arial"/>
+              <a:buNone/>
+            </a:pPr>
+            <a:r>
+              <a:rPr lang="es"/>
+              <a:t>3.4.	Medidas de posición</a:t>
+            </a:r>
+            <a:endParaRPr/>
+          </a:p>
+          <a:p>
+            <a:pPr indent="0" lvl="0" marL="0" rtl="0" algn="l">
+              <a:spcBef>
+                <a:spcPts val="0"/>
+              </a:spcBef>
+              <a:spcAft>
+                <a:spcPts val="0"/>
+              </a:spcAft>
+              <a:buClr>
+                <a:schemeClr val="dk1"/>
+              </a:buClr>
+              <a:buSzPts val="605"/>
+              <a:buFont typeface="Arial"/>
+              <a:buNone/>
+            </a:pPr>
+            <a:r>
+              <a:rPr lang="es"/>
+              <a:t>3.5.	Medidas de forma</a:t>
+            </a:r>
+            <a:endParaRPr/>
+          </a:p>
+          <a:p>
+            <a:pPr indent="0" lvl="0" marL="0" rtl="0" algn="l">
+              <a:spcBef>
+                <a:spcPts val="0"/>
+              </a:spcBef>
+              <a:spcAft>
+                <a:spcPts val="0"/>
+              </a:spcAft>
+              <a:buClr>
+                <a:schemeClr val="dk1"/>
+              </a:buClr>
+              <a:buSzPts val="605"/>
+              <a:buFont typeface="Arial"/>
+              <a:buNone/>
+            </a:pPr>
+            <a:r>
+              <a:rPr lang="es"/>
+              <a:t>3.6.	Visualizaciones de datos </a:t>
+            </a:r>
+            <a:endParaRPr/>
+          </a:p>
+          <a:p>
+            <a:pPr indent="0" lvl="0" marL="457200" rtl="0" algn="l">
+              <a:spcBef>
+                <a:spcPts val="0"/>
+              </a:spcBef>
+              <a:spcAft>
+                <a:spcPts val="0"/>
+              </a:spcAft>
+              <a:buClr>
+                <a:schemeClr val="dk1"/>
+              </a:buClr>
+              <a:buSzPts val="605"/>
+              <a:buFont typeface="Arial"/>
+              <a:buNone/>
+            </a:pPr>
+            <a:r>
+              <a:t/>
+            </a:r>
+            <a:endParaRPr/>
+          </a:p>
+          <a:p>
+            <a:pPr indent="0" lvl="0" marL="457200" rtl="0" algn="l">
+              <a:spcBef>
+                <a:spcPts val="0"/>
+              </a:spcBef>
+              <a:spcAft>
+                <a:spcPts val="0"/>
+              </a:spcAft>
+              <a:buClr>
+                <a:schemeClr val="dk1"/>
+              </a:buClr>
+              <a:buSzPts val="605"/>
+              <a:buFont typeface="Arial"/>
+              <a:buNone/>
+            </a:pPr>
+            <a:r>
+              <a:t/>
+            </a:r>
+            <a:endParaRPr/>
+          </a:p>
+          <a:p>
+            <a:pPr indent="0" lvl="0" marL="0" rtl="0" algn="l">
+              <a:spcBef>
+                <a:spcPts val="0"/>
+              </a:spcBef>
+              <a:spcAft>
+                <a:spcPts val="0"/>
+              </a:spcAft>
+              <a:buClr>
+                <a:schemeClr val="dk1"/>
+              </a:buClr>
+              <a:buSzPts val="605"/>
+              <a:buFont typeface="Arial"/>
+              <a:buNone/>
+            </a:pPr>
+            <a:r>
+              <a:rPr b="1" lang="es">
+                <a:highlight>
+                  <a:srgbClr val="A2C4C9"/>
+                </a:highlight>
+              </a:rPr>
+              <a:t>4. Estadística descriptiva bivariada</a:t>
             </a:r>
             <a:endParaRPr b="1">
               <a:latin typeface="EB Garamond"/>
@@ -9161,6 +9366,9 @@
           </a:p>
           <a:p>
             <a:pPr indent="0" lvl="0" marL="0" rtl="0" algn="l">
+              <a:lnSpc>
+                <a:spcPct val="115454"/>
+              </a:lnSpc>
               <a:spcBef>
                 <a:spcPts val="0"/>
               </a:spcBef>
@@ -9170,45 +9378,21 @@
               <a:buClr>
                 <a:schemeClr val="dk1"/>
               </a:buClr>
-              <a:buSzPts val="605"/>
+              <a:buSzPts val="1100"/>
               <a:buFont typeface="Arial"/>
               <a:buNone/>
             </a:pPr>
             <a:r>
               <a:rPr lang="es"/>
-              <a:t>3</a:t>
-            </a:r>
-            <a:r>
-              <a:rPr lang="es">
-                <a:latin typeface="EB Garamond"/>
-                <a:ea typeface="EB Garamond"/>
-                <a:cs typeface="EB Garamond"/>
-                <a:sym typeface="EB Garamond"/>
-              </a:rPr>
-              <a:t>.</a:t>
-            </a:r>
-            <a:r>
-              <a:rPr lang="es"/>
-              <a:t>1</a:t>
-            </a:r>
-            <a:r>
-              <a:rPr lang="es">
-                <a:latin typeface="EB Garamond"/>
-                <a:ea typeface="EB Garamond"/>
-                <a:cs typeface="EB Garamond"/>
-                <a:sym typeface="EB Garamond"/>
-              </a:rPr>
-              <a:t>. Tipos de análisis estadístico univariado</a:t>
-            </a:r>
-            <a:endParaRPr>
-              <a:latin typeface="EB Garamond"/>
-              <a:ea typeface="EB Garamond"/>
-              <a:cs typeface="EB Garamond"/>
-              <a:sym typeface="EB Garamond"/>
-            </a:endParaRPr>
+              <a:t>4.1. Tablas de contingencia</a:t>
+            </a:r>
+            <a:endParaRPr/>
           </a:p>
           <a:p>
             <a:pPr indent="0" lvl="0" marL="0" rtl="0" algn="l">
+              <a:lnSpc>
+                <a:spcPct val="115454"/>
+              </a:lnSpc>
               <a:spcBef>
                 <a:spcPts val="0"/>
               </a:spcBef>
@@ -9218,45 +9402,21 @@
               <a:buClr>
                 <a:schemeClr val="dk1"/>
               </a:buClr>
-              <a:buSzPts val="605"/>
+              <a:buSzPts val="1100"/>
               <a:buFont typeface="Arial"/>
               <a:buNone/>
             </a:pPr>
             <a:r>
               <a:rPr lang="es"/>
-              <a:t>3</a:t>
-            </a:r>
-            <a:r>
-              <a:rPr lang="es">
-                <a:latin typeface="EB Garamond"/>
-                <a:ea typeface="EB Garamond"/>
-                <a:cs typeface="EB Garamond"/>
-                <a:sym typeface="EB Garamond"/>
-              </a:rPr>
-              <a:t>.</a:t>
-            </a:r>
-            <a:r>
-              <a:rPr lang="es"/>
-              <a:t>2</a:t>
-            </a:r>
-            <a:r>
-              <a:rPr lang="es">
-                <a:latin typeface="EB Garamond"/>
-                <a:ea typeface="EB Garamond"/>
-                <a:cs typeface="EB Garamond"/>
-                <a:sym typeface="EB Garamond"/>
-              </a:rPr>
-              <a:t>. Frecuencias</a:t>
-            </a:r>
-            <a:endParaRPr>
-              <a:latin typeface="EB Garamond"/>
-              <a:ea typeface="EB Garamond"/>
-              <a:cs typeface="EB Garamond"/>
-              <a:sym typeface="EB Garamond"/>
-            </a:endParaRPr>
+              <a:t>4.2. La noción de asociación entre variables</a:t>
+            </a:r>
+            <a:endParaRPr/>
           </a:p>
           <a:p>
             <a:pPr indent="0" lvl="0" marL="0" rtl="0" algn="l">
+              <a:lnSpc>
+                <a:spcPct val="115454"/>
+              </a:lnSpc>
               <a:spcBef>
                 <a:spcPts val="0"/>
               </a:spcBef>
@@ -9266,378 +9426,34 @@
               <a:buClr>
                 <a:schemeClr val="dk1"/>
               </a:buClr>
-              <a:buSzPts val="605"/>
+              <a:buSzPts val="1100"/>
               <a:buFont typeface="Arial"/>
               <a:buNone/>
             </a:pPr>
             <a:r>
               <a:rPr lang="es"/>
-              <a:t>3</a:t>
-            </a:r>
-            <a:r>
-              <a:rPr lang="es">
-                <a:latin typeface="EB Garamond"/>
-                <a:ea typeface="EB Garamond"/>
-                <a:cs typeface="EB Garamond"/>
-                <a:sym typeface="EB Garamond"/>
-              </a:rPr>
-              <a:t>.</a:t>
-            </a:r>
-            <a:r>
-              <a:rPr lang="es"/>
-              <a:t>3</a:t>
-            </a:r>
-            <a:r>
-              <a:rPr lang="es">
-                <a:latin typeface="EB Garamond"/>
-                <a:ea typeface="EB Garamond"/>
-                <a:cs typeface="EB Garamond"/>
-                <a:sym typeface="EB Garamond"/>
-              </a:rPr>
-              <a:t>. Medidas de tendencia central</a:t>
-            </a:r>
-            <a:endParaRPr>
-              <a:latin typeface="EB Garamond"/>
-              <a:ea typeface="EB Garamond"/>
-              <a:cs typeface="EB Garamond"/>
-              <a:sym typeface="EB Garamond"/>
-            </a:endParaRPr>
+              <a:t>4.3. Correlación</a:t>
+            </a:r>
+            <a:endParaRPr/>
           </a:p>
           <a:p>
             <a:pPr indent="0" lvl="0" marL="0" rtl="0" algn="l">
-              <a:spcBef>
-                <a:spcPts val="0"/>
-              </a:spcBef>
-              <a:spcAft>
-                <a:spcPts val="0"/>
-              </a:spcAft>
-              <a:buClr>
-                <a:schemeClr val="dk1"/>
-              </a:buClr>
-              <a:buSzPts val="605"/>
-              <a:buFont typeface="Arial"/>
+              <a:lnSpc>
+                <a:spcPct val="115454"/>
+              </a:lnSpc>
+              <a:spcBef>
+                <a:spcPts val="0"/>
+              </a:spcBef>
+              <a:spcAft>
+                <a:spcPts val="0"/>
+              </a:spcAft>
               <a:buNone/>
             </a:pPr>
             <a:r>
               <a:rPr lang="es"/>
-              <a:t>3.4</a:t>
-            </a:r>
-            <a:r>
-              <a:rPr lang="es">
-                <a:latin typeface="EB Garamond"/>
-                <a:ea typeface="EB Garamond"/>
-                <a:cs typeface="EB Garamond"/>
-                <a:sym typeface="EB Garamond"/>
-              </a:rPr>
-              <a:t>. Medidas de dispersión</a:t>
-            </a:r>
-            <a:endParaRPr>
-              <a:latin typeface="EB Garamond"/>
-              <a:ea typeface="EB Garamond"/>
-              <a:cs typeface="EB Garamond"/>
-              <a:sym typeface="EB Garamond"/>
-            </a:endParaRPr>
-          </a:p>
-          <a:p>
-            <a:pPr indent="0" lvl="0" marL="0" rtl="0" algn="l">
-              <a:spcBef>
-                <a:spcPts val="0"/>
-              </a:spcBef>
-              <a:spcAft>
-                <a:spcPts val="0"/>
-              </a:spcAft>
-              <a:buClr>
-                <a:schemeClr val="dk1"/>
-              </a:buClr>
-              <a:buSzPts val="605"/>
-              <a:buFont typeface="Arial"/>
-              <a:buNone/>
-            </a:pPr>
-            <a:r>
-              <a:rPr lang="es"/>
-              <a:t>3.5</a:t>
-            </a:r>
-            <a:r>
-              <a:rPr lang="es">
-                <a:latin typeface="EB Garamond"/>
-                <a:ea typeface="EB Garamond"/>
-                <a:cs typeface="EB Garamond"/>
-                <a:sym typeface="EB Garamond"/>
-              </a:rPr>
-              <a:t>. Medidas de posición</a:t>
-            </a:r>
-            <a:endParaRPr>
-              <a:latin typeface="EB Garamond"/>
-              <a:ea typeface="EB Garamond"/>
-              <a:cs typeface="EB Garamond"/>
-              <a:sym typeface="EB Garamond"/>
-            </a:endParaRPr>
-          </a:p>
-          <a:p>
-            <a:pPr indent="0" lvl="0" marL="0" rtl="0" algn="l">
-              <a:spcBef>
-                <a:spcPts val="0"/>
-              </a:spcBef>
-              <a:spcAft>
-                <a:spcPts val="0"/>
-              </a:spcAft>
-              <a:buClr>
-                <a:schemeClr val="dk1"/>
-              </a:buClr>
-              <a:buSzPts val="605"/>
-              <a:buFont typeface="Arial"/>
-              <a:buNone/>
-            </a:pPr>
-            <a:r>
-              <a:rPr lang="es"/>
-              <a:t>3.6</a:t>
-            </a:r>
-            <a:r>
-              <a:rPr lang="es">
-                <a:latin typeface="EB Garamond"/>
-                <a:ea typeface="EB Garamond"/>
-                <a:cs typeface="EB Garamond"/>
-                <a:sym typeface="EB Garamond"/>
-              </a:rPr>
-              <a:t>. Medidas de forma</a:t>
-            </a:r>
-            <a:endParaRPr>
-              <a:latin typeface="EB Garamond"/>
-              <a:ea typeface="EB Garamond"/>
-              <a:cs typeface="EB Garamond"/>
-              <a:sym typeface="EB Garamond"/>
-            </a:endParaRPr>
-          </a:p>
-          <a:p>
-            <a:pPr indent="0" lvl="0" marL="0" rtl="0" algn="l">
-              <a:spcBef>
-                <a:spcPts val="0"/>
-              </a:spcBef>
-              <a:spcAft>
-                <a:spcPts val="0"/>
-              </a:spcAft>
-              <a:buClr>
-                <a:schemeClr val="dk1"/>
-              </a:buClr>
-              <a:buSzPts val="605"/>
-              <a:buFont typeface="Arial"/>
-              <a:buNone/>
-            </a:pPr>
-            <a:r>
-              <a:rPr lang="es"/>
-              <a:t>3.7. Visualización</a:t>
+              <a:t>4.4. Visualizaciones de datos </a:t>
             </a:r>
             <a:endParaRPr/>
-          </a:p>
-          <a:p>
-            <a:pPr indent="0" lvl="0" marL="457200" rtl="0" algn="l">
-              <a:spcBef>
-                <a:spcPts val="0"/>
-              </a:spcBef>
-              <a:spcAft>
-                <a:spcPts val="0"/>
-              </a:spcAft>
-              <a:buClr>
-                <a:schemeClr val="dk1"/>
-              </a:buClr>
-              <a:buSzPts val="605"/>
-              <a:buFont typeface="Arial"/>
-              <a:buNone/>
-            </a:pPr>
-            <a:r>
-              <a:t/>
-            </a:r>
-            <a:endParaRPr>
-              <a:latin typeface="EB Garamond"/>
-              <a:ea typeface="EB Garamond"/>
-              <a:cs typeface="EB Garamond"/>
-              <a:sym typeface="EB Garamond"/>
-            </a:endParaRPr>
-          </a:p>
-          <a:p>
-            <a:pPr indent="0" lvl="0" marL="0" rtl="0" algn="l">
-              <a:spcBef>
-                <a:spcPts val="0"/>
-              </a:spcBef>
-              <a:spcAft>
-                <a:spcPts val="0"/>
-              </a:spcAft>
-              <a:buClr>
-                <a:schemeClr val="dk1"/>
-              </a:buClr>
-              <a:buSzPts val="605"/>
-              <a:buFont typeface="Arial"/>
-              <a:buNone/>
-            </a:pPr>
-            <a:r>
-              <a:rPr b="1" lang="es"/>
-              <a:t>4</a:t>
-            </a:r>
-            <a:r>
-              <a:rPr b="1" lang="es">
-                <a:latin typeface="EB Garamond"/>
-                <a:ea typeface="EB Garamond"/>
-                <a:cs typeface="EB Garamond"/>
-                <a:sym typeface="EB Garamond"/>
-              </a:rPr>
-              <a:t>. Análisis de datos descriptivo bivariado</a:t>
-            </a:r>
-            <a:endParaRPr b="1">
-              <a:latin typeface="EB Garamond"/>
-              <a:ea typeface="EB Garamond"/>
-              <a:cs typeface="EB Garamond"/>
-              <a:sym typeface="EB Garamond"/>
-            </a:endParaRPr>
-          </a:p>
-          <a:p>
-            <a:pPr indent="0" lvl="0" marL="0" marR="25400" rtl="0" algn="just">
-              <a:lnSpc>
-                <a:spcPct val="115000"/>
-              </a:lnSpc>
-              <a:spcBef>
-                <a:spcPts val="0"/>
-              </a:spcBef>
-              <a:spcAft>
-                <a:spcPts val="0"/>
-              </a:spcAft>
-              <a:buNone/>
-            </a:pPr>
-            <a:r>
-              <a:rPr lang="es"/>
-              <a:t>4</a:t>
-            </a:r>
-            <a:r>
-              <a:rPr lang="es">
-                <a:latin typeface="EB Garamond"/>
-                <a:ea typeface="EB Garamond"/>
-                <a:cs typeface="EB Garamond"/>
-                <a:sym typeface="EB Garamond"/>
-              </a:rPr>
-              <a:t>.1. Tipos de análisis estadístico bivariado</a:t>
-            </a:r>
-            <a:endParaRPr>
-              <a:latin typeface="EB Garamond"/>
-              <a:ea typeface="EB Garamond"/>
-              <a:cs typeface="EB Garamond"/>
-              <a:sym typeface="EB Garamond"/>
-            </a:endParaRPr>
-          </a:p>
-          <a:p>
-            <a:pPr indent="0" lvl="0" marL="0" marR="25400" rtl="0" algn="just">
-              <a:lnSpc>
-                <a:spcPct val="115000"/>
-              </a:lnSpc>
-              <a:spcBef>
-                <a:spcPts val="0"/>
-              </a:spcBef>
-              <a:spcAft>
-                <a:spcPts val="0"/>
-              </a:spcAft>
-              <a:buNone/>
-            </a:pPr>
-            <a:r>
-              <a:rPr lang="es"/>
-              <a:t>4</a:t>
-            </a:r>
-            <a:r>
-              <a:rPr lang="es">
-                <a:latin typeface="EB Garamond"/>
-                <a:ea typeface="EB Garamond"/>
-                <a:cs typeface="EB Garamond"/>
-                <a:sym typeface="EB Garamond"/>
-              </a:rPr>
-              <a:t>.2. Tablas de contingencia</a:t>
-            </a:r>
-            <a:endParaRPr>
-              <a:latin typeface="EB Garamond"/>
-              <a:ea typeface="EB Garamond"/>
-              <a:cs typeface="EB Garamond"/>
-              <a:sym typeface="EB Garamond"/>
-            </a:endParaRPr>
-          </a:p>
-          <a:p>
-            <a:pPr indent="0" lvl="0" marL="0" marR="25400" rtl="0" algn="just">
-              <a:lnSpc>
-                <a:spcPct val="115000"/>
-              </a:lnSpc>
-              <a:spcBef>
-                <a:spcPts val="0"/>
-              </a:spcBef>
-              <a:spcAft>
-                <a:spcPts val="0"/>
-              </a:spcAft>
-              <a:buNone/>
-            </a:pPr>
-            <a:r>
-              <a:rPr lang="es"/>
-              <a:t>4.3. Correlación </a:t>
-            </a:r>
-            <a:endParaRPr/>
-          </a:p>
-          <a:p>
-            <a:pPr indent="0" lvl="0" marL="0" marR="25400" rtl="0" algn="just">
-              <a:lnSpc>
-                <a:spcPct val="115000"/>
-              </a:lnSpc>
-              <a:spcBef>
-                <a:spcPts val="0"/>
-              </a:spcBef>
-              <a:spcAft>
-                <a:spcPts val="0"/>
-              </a:spcAft>
-              <a:buNone/>
-            </a:pPr>
-            <a:r>
-              <a:rPr lang="es"/>
-              <a:t>4.4. Visualización</a:t>
-            </a:r>
-            <a:endParaRPr/>
-          </a:p>
-          <a:p>
-            <a:pPr indent="0" lvl="0" marL="0" marR="25400" rtl="0" algn="just">
-              <a:lnSpc>
-                <a:spcPct val="115000"/>
-              </a:lnSpc>
-              <a:spcBef>
-                <a:spcPts val="0"/>
-              </a:spcBef>
-              <a:spcAft>
-                <a:spcPts val="0"/>
-              </a:spcAft>
-              <a:buNone/>
-            </a:pPr>
-            <a:r>
-              <a:rPr lang="es"/>
-              <a:t>4</a:t>
-            </a:r>
-            <a:r>
-              <a:rPr lang="es">
-                <a:latin typeface="EB Garamond"/>
-                <a:ea typeface="EB Garamond"/>
-                <a:cs typeface="EB Garamond"/>
-                <a:sym typeface="EB Garamond"/>
-              </a:rPr>
-              <a:t>.</a:t>
-            </a:r>
-            <a:r>
-              <a:rPr lang="es"/>
-              <a:t>5</a:t>
-            </a:r>
-            <a:r>
-              <a:rPr lang="es">
-                <a:latin typeface="EB Garamond"/>
-                <a:ea typeface="EB Garamond"/>
-                <a:cs typeface="EB Garamond"/>
-                <a:sym typeface="EB Garamond"/>
-              </a:rPr>
-              <a:t>. Indicadores, Índices y Escalas</a:t>
-            </a:r>
-            <a:endParaRPr>
-              <a:latin typeface="EB Garamond"/>
-              <a:ea typeface="EB Garamond"/>
-              <a:cs typeface="EB Garamond"/>
-              <a:sym typeface="EB Garamond"/>
-            </a:endParaRPr>
           </a:p>
           <a:p>
             <a:pPr indent="0" lvl="0" marL="0" marR="25400" rtl="0" algn="just">
@@ -9779,7 +9595,7 @@
         <p:spPr>
           <a:xfrm>
             <a:off x="311700" y="1152475"/>
-            <a:ext cx="8520600" cy="3416400"/>
+            <a:ext cx="8520600" cy="1905000"/>
           </a:xfrm>
           <a:prstGeom prst="rect">
             <a:avLst/>
@@ -9800,193 +9616,41 @@
                 <a:spcPts val="0"/>
               </a:spcBef>
               <a:spcAft>
-                <a:spcPts val="0"/>
+                <a:spcPts val="1200"/>
               </a:spcAft>
               <a:buNone/>
             </a:pPr>
-            <a:r>
-              <a:t/>
-            </a:r>
-            <a:endParaRPr>
-              <a:latin typeface="EB Garamond"/>
-              <a:ea typeface="EB Garamond"/>
-              <a:cs typeface="EB Garamond"/>
-              <a:sym typeface="EB Garamond"/>
-            </a:endParaRPr>
-          </a:p>
-          <a:p>
-            <a:pPr indent="0" lvl="0" marL="0" rtl="0" algn="l">
-              <a:spcBef>
-                <a:spcPts val="1200"/>
-              </a:spcBef>
-              <a:spcAft>
-                <a:spcPts val="0"/>
-              </a:spcAft>
-              <a:buNone/>
-            </a:pPr>
-            <a:r>
-              <a:rPr lang="es">
-                <a:latin typeface="EB Garamond"/>
-                <a:ea typeface="EB Garamond"/>
-                <a:cs typeface="EB Garamond"/>
-                <a:sym typeface="EB Garamond"/>
-              </a:rPr>
-              <a:t>Clases presenciales </a:t>
-            </a:r>
             <a:r>
               <a:rPr b="1" lang="es">
                 <a:highlight>
                   <a:srgbClr val="A2C4C9"/>
                 </a:highlight>
               </a:rPr>
-              <a:t>teórico-prácticas</a:t>
-            </a:r>
-            <a:r>
-              <a:rPr lang="es">
-                <a:latin typeface="EB Garamond"/>
-                <a:ea typeface="EB Garamond"/>
-                <a:cs typeface="EB Garamond"/>
-                <a:sym typeface="EB Garamond"/>
+              <a:t>Cinco sesiones de cátedra</a:t>
+            </a:r>
+            <a:r>
+              <a:rPr lang="es"/>
+              <a:t> desarrolladas sobre la base de </a:t>
+            </a:r>
+            <a:r>
+              <a:rPr b="1" lang="es"/>
+              <a:t>clases expositivas y discusión de ejemplos aplicados en R</a:t>
+            </a:r>
+            <a:r>
+              <a:rPr lang="es"/>
+              <a:t>, permitiendo el trabajo sobre los distintos tópicos detallados en el contenido. </a:t>
+            </a:r>
+            <a:r>
+              <a:rPr b="1" lang="es">
+                <a:highlight>
+                  <a:srgbClr val="A2C4C9"/>
+                </a:highlight>
               </a:rPr>
-              <a:t>, donde conoceremos los conceptos fundamentales para la investigación social cuantitativa y aplicaremos estos conocimientos utilizando estadística descriptiva </a:t>
+              <a:t>Dos sesiones de ayudantía</a:t>
             </a:r>
             <a:r>
               <a:rPr lang="es"/>
-              <a:t>a través del software R</a:t>
-            </a:r>
-            <a:r>
-              <a:rPr lang="es">
-                <a:latin typeface="EB Garamond"/>
-                <a:ea typeface="EB Garamond"/>
-                <a:cs typeface="EB Garamond"/>
-                <a:sym typeface="EB Garamond"/>
-              </a:rPr>
-              <a:t>.</a:t>
-            </a:r>
-            <a:endParaRPr>
-              <a:latin typeface="EB Garamond"/>
-              <a:ea typeface="EB Garamond"/>
-              <a:cs typeface="EB Garamond"/>
-              <a:sym typeface="EB Garamond"/>
-            </a:endParaRPr>
-          </a:p>
-          <a:p>
-            <a:pPr indent="0" lvl="0" marL="0" rtl="0" algn="l">
-              <a:spcBef>
-                <a:spcPts val="1200"/>
-              </a:spcBef>
-              <a:spcAft>
-                <a:spcPts val="0"/>
-              </a:spcAft>
-              <a:buNone/>
-            </a:pPr>
-            <a:r>
-              <a:rPr lang="es">
-                <a:latin typeface="EB Garamond"/>
-                <a:ea typeface="EB Garamond"/>
-                <a:cs typeface="EB Garamond"/>
-                <a:sym typeface="EB Garamond"/>
-              </a:rPr>
-              <a:t>Semanalmente</a:t>
-            </a:r>
-            <a:r>
-              <a:rPr lang="es"/>
-              <a:t> tendremos tres</a:t>
-            </a:r>
-            <a:r>
-              <a:rPr lang="es">
-                <a:latin typeface="EB Garamond"/>
-                <a:ea typeface="EB Garamond"/>
-                <a:cs typeface="EB Garamond"/>
-                <a:sym typeface="EB Garamond"/>
-              </a:rPr>
-              <a:t> bloques </a:t>
-            </a:r>
-            <a:r>
-              <a:rPr lang="es"/>
-              <a:t>de</a:t>
-            </a:r>
-            <a:r>
-              <a:rPr lang="es">
-                <a:latin typeface="EB Garamond"/>
-                <a:ea typeface="EB Garamond"/>
-                <a:cs typeface="EB Garamond"/>
-                <a:sym typeface="EB Garamond"/>
-              </a:rPr>
-              <a:t> clases, y algunas semanas un bloque a ayudantía.</a:t>
-            </a:r>
-            <a:endParaRPr>
-              <a:latin typeface="EB Garamond"/>
-              <a:ea typeface="EB Garamond"/>
-              <a:cs typeface="EB Garamond"/>
-              <a:sym typeface="EB Garamond"/>
-            </a:endParaRPr>
-          </a:p>
-          <a:p>
-            <a:pPr indent="-330200" lvl="0" marL="457200" rtl="0" algn="l">
-              <a:spcBef>
-                <a:spcPts val="1200"/>
-              </a:spcBef>
-              <a:spcAft>
-                <a:spcPts val="0"/>
-              </a:spcAft>
-              <a:buSzPts val="1600"/>
-              <a:buFont typeface="EB Garamond"/>
-              <a:buChar char="●"/>
-            </a:pPr>
-            <a:r>
-              <a:rPr lang="es" sz="1600"/>
-              <a:t>Bloque 1: Lunes 08:30 - 09:45 hrs.</a:t>
-            </a:r>
-            <a:endParaRPr sz="1600">
-              <a:latin typeface="EB Garamond"/>
-              <a:ea typeface="EB Garamond"/>
-              <a:cs typeface="EB Garamond"/>
-              <a:sym typeface="EB Garamond"/>
-            </a:endParaRPr>
-          </a:p>
-          <a:p>
-            <a:pPr indent="-330200" lvl="0" marL="457200" rtl="0" algn="l">
-              <a:spcBef>
-                <a:spcPts val="0"/>
-              </a:spcBef>
-              <a:spcAft>
-                <a:spcPts val="0"/>
-              </a:spcAft>
-              <a:buSzPts val="1600"/>
-              <a:buFont typeface="EB Garamond"/>
-              <a:buChar char="●"/>
-            </a:pPr>
-            <a:r>
-              <a:rPr lang="es" sz="1600">
-                <a:latin typeface="EB Garamond"/>
-                <a:ea typeface="EB Garamond"/>
-                <a:cs typeface="EB Garamond"/>
-                <a:sym typeface="EB Garamond"/>
-              </a:rPr>
-              <a:t>Bloque 2: Lunes 09:50 - 11:05 hrs.</a:t>
-            </a:r>
-            <a:endParaRPr sz="1600">
-              <a:latin typeface="EB Garamond"/>
-              <a:ea typeface="EB Garamond"/>
-              <a:cs typeface="EB Garamond"/>
-              <a:sym typeface="EB Garamond"/>
-            </a:endParaRPr>
-          </a:p>
-          <a:p>
-            <a:pPr indent="-330200" lvl="0" marL="457200" rtl="0" algn="l">
-              <a:spcBef>
-                <a:spcPts val="0"/>
-              </a:spcBef>
-              <a:spcAft>
-                <a:spcPts val="0"/>
-              </a:spcAft>
-              <a:buSzPts val="1600"/>
-              <a:buChar char="●"/>
-            </a:pPr>
-            <a:r>
-              <a:rPr lang="es" sz="1600"/>
-              <a:t>Bloque 3: Lunes 11:10 - 12:25 hrs.</a:t>
+              <a:t> en las que se trabaja la aplicación práctica en R.</a:t>
             </a:r>
             <a:endParaRPr>
               <a:latin typeface="EB Garamond"/>
@@ -9997,6 +9661,823 @@
           </a:p>
         </p:txBody>
       </p:sp>
+      <p:graphicFrame>
+        <p:nvGraphicFramePr>
+          <p:cNvPr id="96" name="Google Shape;96;p19"/>
+          <p:cNvGraphicFramePr/>
+          <p:nvPr/>
+        </p:nvGraphicFramePr>
+        <p:xfrm>
+          <a:off x="1729425" y="2355675"/>
+          <a:ext cx="3000000" cy="3000000"/>
+        </p:xfrm>
+        <a:graphic>
+          <a:graphicData uri="http://schemas.openxmlformats.org/drawingml/2006/table">
+            <a:tbl>
+              <a:tblPr>
+                <a:noFill/>
+                <a:tableStyleId>{69515D36-6FF7-48D5-A226-D6F2A6FE5446}</a:tableStyleId>
+              </a:tblPr>
+              <a:tblGrid>
+                <a:gridCol w="1895050"/>
+                <a:gridCol w="1895050"/>
+                <a:gridCol w="1895050"/>
+              </a:tblGrid>
+              <a:tr h="212150">
+                <a:tc>
+                  <a:txBody>
+                    <a:bodyPr/>
+                    <a:lstStyle/>
+                    <a:p>
+                      <a:pPr indent="0" lvl="0" marL="0" rtl="0" algn="l">
+                        <a:spcBef>
+                          <a:spcPts val="0"/>
+                        </a:spcBef>
+                        <a:spcAft>
+                          <a:spcPts val="0"/>
+                        </a:spcAft>
+                        <a:buNone/>
+                      </a:pPr>
+                      <a:r>
+                        <a:rPr lang="es" sz="1200">
+                          <a:latin typeface="EB Garamond"/>
+                          <a:ea typeface="EB Garamond"/>
+                          <a:cs typeface="EB Garamond"/>
+                          <a:sym typeface="EB Garamond"/>
+                        </a:rPr>
+                        <a:t>Jueves 30/04</a:t>
+                      </a:r>
+                      <a:endParaRPr sz="1200">
+                        <a:latin typeface="EB Garamond"/>
+                        <a:ea typeface="EB Garamond"/>
+                        <a:cs typeface="EB Garamond"/>
+                        <a:sym typeface="EB Garamond"/>
+                      </a:endParaRPr>
+                    </a:p>
+                  </a:txBody>
+                  <a:tcPr marT="91425" marB="91425" marR="91425" marL="91425">
+                    <a:solidFill>
+                      <a:srgbClr val="D0E0E3"/>
+                    </a:solidFill>
+                  </a:tcPr>
+                </a:tc>
+                <a:tc>
+                  <a:txBody>
+                    <a:bodyPr/>
+                    <a:lstStyle/>
+                    <a:p>
+                      <a:pPr indent="0" lvl="0" marL="0" rtl="0" algn="l">
+                        <a:spcBef>
+                          <a:spcPts val="0"/>
+                        </a:spcBef>
+                        <a:spcAft>
+                          <a:spcPts val="0"/>
+                        </a:spcAft>
+                        <a:buNone/>
+                      </a:pPr>
+                      <a:r>
+                        <a:rPr lang="es" sz="1200">
+                          <a:latin typeface="EB Garamond"/>
+                          <a:ea typeface="EB Garamond"/>
+                          <a:cs typeface="EB Garamond"/>
+                          <a:sym typeface="EB Garamond"/>
+                        </a:rPr>
+                        <a:t>Clase 01</a:t>
+                      </a:r>
+                      <a:endParaRPr sz="1200">
+                        <a:latin typeface="EB Garamond"/>
+                        <a:ea typeface="EB Garamond"/>
+                        <a:cs typeface="EB Garamond"/>
+                        <a:sym typeface="EB Garamond"/>
+                      </a:endParaRPr>
+                    </a:p>
+                  </a:txBody>
+                  <a:tcPr marT="91425" marB="91425" marR="91425" marL="91425">
+                    <a:solidFill>
+                      <a:srgbClr val="D0E0E3"/>
+                    </a:solidFill>
+                  </a:tcPr>
+                </a:tc>
+                <a:tc>
+                  <a:txBody>
+                    <a:bodyPr/>
+                    <a:lstStyle/>
+                    <a:p>
+                      <a:pPr indent="0" lvl="0" marL="0" rtl="0" algn="l">
+                        <a:spcBef>
+                          <a:spcPts val="0"/>
+                        </a:spcBef>
+                        <a:spcAft>
+                          <a:spcPts val="0"/>
+                        </a:spcAft>
+                        <a:buNone/>
+                      </a:pPr>
+                      <a:r>
+                        <a:rPr lang="es" sz="1200">
+                          <a:latin typeface="EB Garamond"/>
+                          <a:ea typeface="EB Garamond"/>
+                          <a:cs typeface="EB Garamond"/>
+                          <a:sym typeface="EB Garamond"/>
+                        </a:rPr>
+                        <a:t>Presencial</a:t>
+                      </a:r>
+                      <a:endParaRPr sz="1200">
+                        <a:latin typeface="EB Garamond"/>
+                        <a:ea typeface="EB Garamond"/>
+                        <a:cs typeface="EB Garamond"/>
+                        <a:sym typeface="EB Garamond"/>
+                      </a:endParaRPr>
+                    </a:p>
+                  </a:txBody>
+                  <a:tcPr marT="91425" marB="91425" marR="91425" marL="91425">
+                    <a:solidFill>
+                      <a:srgbClr val="D0E0E3"/>
+                    </a:solidFill>
+                  </a:tcPr>
+                </a:tc>
+              </a:tr>
+              <a:tr h="212150">
+                <a:tc>
+                  <a:txBody>
+                    <a:bodyPr/>
+                    <a:lstStyle/>
+                    <a:p>
+                      <a:pPr indent="0" lvl="0" marL="0" rtl="0" algn="l">
+                        <a:spcBef>
+                          <a:spcPts val="0"/>
+                        </a:spcBef>
+                        <a:spcAft>
+                          <a:spcPts val="0"/>
+                        </a:spcAft>
+                        <a:buNone/>
+                      </a:pPr>
+                      <a:r>
+                        <a:rPr lang="es" sz="1200">
+                          <a:latin typeface="EB Garamond"/>
+                          <a:ea typeface="EB Garamond"/>
+                          <a:cs typeface="EB Garamond"/>
+                          <a:sym typeface="EB Garamond"/>
+                        </a:rPr>
+                        <a:t>Jueves 07/05</a:t>
+                      </a:r>
+                      <a:endParaRPr sz="1200">
+                        <a:latin typeface="EB Garamond"/>
+                        <a:ea typeface="EB Garamond"/>
+                        <a:cs typeface="EB Garamond"/>
+                        <a:sym typeface="EB Garamond"/>
+                      </a:endParaRPr>
+                    </a:p>
+                  </a:txBody>
+                  <a:tcPr marT="91425" marB="91425" marR="91425" marL="91425">
+                    <a:solidFill>
+                      <a:srgbClr val="D0E0E3"/>
+                    </a:solidFill>
+                  </a:tcPr>
+                </a:tc>
+                <a:tc>
+                  <a:txBody>
+                    <a:bodyPr/>
+                    <a:lstStyle/>
+                    <a:p>
+                      <a:pPr indent="0" lvl="0" marL="0" rtl="0" algn="l">
+                        <a:spcBef>
+                          <a:spcPts val="0"/>
+                        </a:spcBef>
+                        <a:spcAft>
+                          <a:spcPts val="0"/>
+                        </a:spcAft>
+                        <a:buNone/>
+                      </a:pPr>
+                      <a:r>
+                        <a:rPr lang="es" sz="1200">
+                          <a:latin typeface="EB Garamond"/>
+                          <a:ea typeface="EB Garamond"/>
+                          <a:cs typeface="EB Garamond"/>
+                          <a:sym typeface="EB Garamond"/>
+                        </a:rPr>
+                        <a:t>Clase 02</a:t>
+                      </a:r>
+                      <a:endParaRPr sz="1200">
+                        <a:latin typeface="EB Garamond"/>
+                        <a:ea typeface="EB Garamond"/>
+                        <a:cs typeface="EB Garamond"/>
+                        <a:sym typeface="EB Garamond"/>
+                      </a:endParaRPr>
+                    </a:p>
+                  </a:txBody>
+                  <a:tcPr marT="91425" marB="91425" marR="91425" marL="91425">
+                    <a:solidFill>
+                      <a:srgbClr val="D0E0E3"/>
+                    </a:solidFill>
+                  </a:tcPr>
+                </a:tc>
+                <a:tc>
+                  <a:txBody>
+                    <a:bodyPr/>
+                    <a:lstStyle/>
+                    <a:p>
+                      <a:pPr indent="0" lvl="0" marL="0" rtl="0" algn="l">
+                        <a:spcBef>
+                          <a:spcPts val="0"/>
+                        </a:spcBef>
+                        <a:spcAft>
+                          <a:spcPts val="0"/>
+                        </a:spcAft>
+                        <a:buNone/>
+                      </a:pPr>
+                      <a:r>
+                        <a:rPr lang="es" sz="1200">
+                          <a:latin typeface="EB Garamond"/>
+                          <a:ea typeface="EB Garamond"/>
+                          <a:cs typeface="EB Garamond"/>
+                          <a:sym typeface="EB Garamond"/>
+                        </a:rPr>
+                        <a:t>Presencial</a:t>
+                      </a:r>
+                      <a:endParaRPr sz="1200">
+                        <a:latin typeface="EB Garamond"/>
+                        <a:ea typeface="EB Garamond"/>
+                        <a:cs typeface="EB Garamond"/>
+                        <a:sym typeface="EB Garamond"/>
+                      </a:endParaRPr>
+                    </a:p>
+                  </a:txBody>
+                  <a:tcPr marT="91425" marB="91425" marR="91425" marL="91425">
+                    <a:solidFill>
+                      <a:srgbClr val="D0E0E3"/>
+                    </a:solidFill>
+                  </a:tcPr>
+                </a:tc>
+              </a:tr>
+              <a:tr h="212150">
+                <a:tc>
+                  <a:txBody>
+                    <a:bodyPr/>
+                    <a:lstStyle/>
+                    <a:p>
+                      <a:pPr indent="0" lvl="0" marL="0" rtl="0" algn="l">
+                        <a:spcBef>
+                          <a:spcPts val="0"/>
+                        </a:spcBef>
+                        <a:spcAft>
+                          <a:spcPts val="0"/>
+                        </a:spcAft>
+                        <a:buNone/>
+                      </a:pPr>
+                      <a:r>
+                        <a:rPr lang="es" sz="1200">
+                          <a:latin typeface="EB Garamond"/>
+                          <a:ea typeface="EB Garamond"/>
+                          <a:cs typeface="EB Garamond"/>
+                          <a:sym typeface="EB Garamond"/>
+                        </a:rPr>
+                        <a:t>Jueves 14/05</a:t>
+                      </a:r>
+                      <a:endParaRPr sz="1200">
+                        <a:latin typeface="EB Garamond"/>
+                        <a:ea typeface="EB Garamond"/>
+                        <a:cs typeface="EB Garamond"/>
+                        <a:sym typeface="EB Garamond"/>
+                      </a:endParaRPr>
+                    </a:p>
+                  </a:txBody>
+                  <a:tcPr marT="91425" marB="91425" marR="91425" marL="91425">
+                    <a:solidFill>
+                      <a:srgbClr val="D0E0E3"/>
+                    </a:solidFill>
+                  </a:tcPr>
+                </a:tc>
+                <a:tc>
+                  <a:txBody>
+                    <a:bodyPr/>
+                    <a:lstStyle/>
+                    <a:p>
+                      <a:pPr indent="0" lvl="0" marL="0" rtl="0" algn="l">
+                        <a:spcBef>
+                          <a:spcPts val="0"/>
+                        </a:spcBef>
+                        <a:spcAft>
+                          <a:spcPts val="0"/>
+                        </a:spcAft>
+                        <a:buNone/>
+                      </a:pPr>
+                      <a:r>
+                        <a:rPr lang="es" sz="1200">
+                          <a:latin typeface="EB Garamond"/>
+                          <a:ea typeface="EB Garamond"/>
+                          <a:cs typeface="EB Garamond"/>
+                          <a:sym typeface="EB Garamond"/>
+                        </a:rPr>
+                        <a:t>Clase 03</a:t>
+                      </a:r>
+                      <a:endParaRPr sz="1200">
+                        <a:latin typeface="EB Garamond"/>
+                        <a:ea typeface="EB Garamond"/>
+                        <a:cs typeface="EB Garamond"/>
+                        <a:sym typeface="EB Garamond"/>
+                      </a:endParaRPr>
+                    </a:p>
+                  </a:txBody>
+                  <a:tcPr marT="91425" marB="91425" marR="91425" marL="91425">
+                    <a:solidFill>
+                      <a:srgbClr val="D0E0E3"/>
+                    </a:solidFill>
+                  </a:tcPr>
+                </a:tc>
+                <a:tc>
+                  <a:txBody>
+                    <a:bodyPr/>
+                    <a:lstStyle/>
+                    <a:p>
+                      <a:pPr indent="0" lvl="0" marL="0" rtl="0" algn="l">
+                        <a:spcBef>
+                          <a:spcPts val="0"/>
+                        </a:spcBef>
+                        <a:spcAft>
+                          <a:spcPts val="0"/>
+                        </a:spcAft>
+                        <a:buNone/>
+                      </a:pPr>
+                      <a:r>
+                        <a:rPr lang="es" sz="1200">
+                          <a:latin typeface="EB Garamond"/>
+                          <a:ea typeface="EB Garamond"/>
+                          <a:cs typeface="EB Garamond"/>
+                          <a:sym typeface="EB Garamond"/>
+                        </a:rPr>
+                        <a:t>Presencial</a:t>
+                      </a:r>
+                      <a:endParaRPr sz="1200">
+                        <a:latin typeface="EB Garamond"/>
+                        <a:ea typeface="EB Garamond"/>
+                        <a:cs typeface="EB Garamond"/>
+                        <a:sym typeface="EB Garamond"/>
+                      </a:endParaRPr>
+                    </a:p>
+                  </a:txBody>
+                  <a:tcPr marT="91425" marB="91425" marR="91425" marL="91425">
+                    <a:solidFill>
+                      <a:srgbClr val="D0E0E3"/>
+                    </a:solidFill>
+                  </a:tcPr>
+                </a:tc>
+              </a:tr>
+              <a:tr h="212150">
+                <a:tc>
+                  <a:txBody>
+                    <a:bodyPr/>
+                    <a:lstStyle/>
+                    <a:p>
+                      <a:pPr indent="0" lvl="0" marL="0" rtl="0" algn="l">
+                        <a:spcBef>
+                          <a:spcPts val="0"/>
+                        </a:spcBef>
+                        <a:spcAft>
+                          <a:spcPts val="0"/>
+                        </a:spcAft>
+                        <a:buNone/>
+                      </a:pPr>
+                      <a:r>
+                        <a:rPr lang="es" sz="1200">
+                          <a:latin typeface="EB Garamond"/>
+                          <a:ea typeface="EB Garamond"/>
+                          <a:cs typeface="EB Garamond"/>
+                          <a:sym typeface="EB Garamond"/>
+                        </a:rPr>
+                        <a:t>Sábado 16/05</a:t>
+                      </a:r>
+                      <a:endParaRPr sz="1200">
+                        <a:latin typeface="EB Garamond"/>
+                        <a:ea typeface="EB Garamond"/>
+                        <a:cs typeface="EB Garamond"/>
+                        <a:sym typeface="EB Garamond"/>
+                      </a:endParaRPr>
+                    </a:p>
+                  </a:txBody>
+                  <a:tcPr marT="91425" marB="91425" marR="91425" marL="91425">
+                    <a:solidFill>
+                      <a:srgbClr val="D0E0E3"/>
+                    </a:solidFill>
+                  </a:tcPr>
+                </a:tc>
+                <a:tc>
+                  <a:txBody>
+                    <a:bodyPr/>
+                    <a:lstStyle/>
+                    <a:p>
+                      <a:pPr indent="0" lvl="0" marL="0" rtl="0" algn="l">
+                        <a:spcBef>
+                          <a:spcPts val="0"/>
+                        </a:spcBef>
+                        <a:spcAft>
+                          <a:spcPts val="0"/>
+                        </a:spcAft>
+                        <a:buNone/>
+                      </a:pPr>
+                      <a:r>
+                        <a:rPr lang="es" sz="1200">
+                          <a:latin typeface="EB Garamond"/>
+                          <a:ea typeface="EB Garamond"/>
+                          <a:cs typeface="EB Garamond"/>
+                          <a:sym typeface="EB Garamond"/>
+                        </a:rPr>
+                        <a:t>Clase 04</a:t>
+                      </a:r>
+                      <a:endParaRPr sz="1200">
+                        <a:latin typeface="EB Garamond"/>
+                        <a:ea typeface="EB Garamond"/>
+                        <a:cs typeface="EB Garamond"/>
+                        <a:sym typeface="EB Garamond"/>
+                      </a:endParaRPr>
+                    </a:p>
+                  </a:txBody>
+                  <a:tcPr marT="91425" marB="91425" marR="91425" marL="91425">
+                    <a:solidFill>
+                      <a:srgbClr val="D0E0E3"/>
+                    </a:solidFill>
+                  </a:tcPr>
+                </a:tc>
+                <a:tc>
+                  <a:txBody>
+                    <a:bodyPr/>
+                    <a:lstStyle/>
+                    <a:p>
+                      <a:pPr indent="0" lvl="0" marL="0" rtl="0" algn="l">
+                        <a:spcBef>
+                          <a:spcPts val="0"/>
+                        </a:spcBef>
+                        <a:spcAft>
+                          <a:spcPts val="0"/>
+                        </a:spcAft>
+                        <a:buNone/>
+                      </a:pPr>
+                      <a:r>
+                        <a:rPr lang="es" sz="1200">
+                          <a:latin typeface="EB Garamond"/>
+                          <a:ea typeface="EB Garamond"/>
+                          <a:cs typeface="EB Garamond"/>
+                          <a:sym typeface="EB Garamond"/>
+                        </a:rPr>
+                        <a:t>Presencial</a:t>
+                      </a:r>
+                      <a:endParaRPr sz="1200">
+                        <a:latin typeface="EB Garamond"/>
+                        <a:ea typeface="EB Garamond"/>
+                        <a:cs typeface="EB Garamond"/>
+                        <a:sym typeface="EB Garamond"/>
+                      </a:endParaRPr>
+                    </a:p>
+                  </a:txBody>
+                  <a:tcPr marT="91425" marB="91425" marR="91425" marL="91425">
+                    <a:solidFill>
+                      <a:srgbClr val="D0E0E3"/>
+                    </a:solidFill>
+                  </a:tcPr>
+                </a:tc>
+              </a:tr>
+              <a:tr h="212150">
+                <a:tc>
+                  <a:txBody>
+                    <a:bodyPr/>
+                    <a:lstStyle/>
+                    <a:p>
+                      <a:pPr indent="0" lvl="0" marL="0" rtl="0" algn="l">
+                        <a:spcBef>
+                          <a:spcPts val="0"/>
+                        </a:spcBef>
+                        <a:spcAft>
+                          <a:spcPts val="0"/>
+                        </a:spcAft>
+                        <a:buNone/>
+                      </a:pPr>
+                      <a:r>
+                        <a:rPr lang="es" sz="1200">
+                          <a:latin typeface="EB Garamond"/>
+                          <a:ea typeface="EB Garamond"/>
+                          <a:cs typeface="EB Garamond"/>
+                          <a:sym typeface="EB Garamond"/>
+                        </a:rPr>
+                        <a:t>Lunes 18/05</a:t>
+                      </a:r>
+                      <a:endParaRPr sz="1200">
+                        <a:latin typeface="EB Garamond"/>
+                        <a:ea typeface="EB Garamond"/>
+                        <a:cs typeface="EB Garamond"/>
+                        <a:sym typeface="EB Garamond"/>
+                      </a:endParaRPr>
+                    </a:p>
+                  </a:txBody>
+                  <a:tcPr marT="91425" marB="91425" marR="91425" marL="91425">
+                    <a:solidFill>
+                      <a:srgbClr val="A2C4C9"/>
+                    </a:solidFill>
+                  </a:tcPr>
+                </a:tc>
+                <a:tc>
+                  <a:txBody>
+                    <a:bodyPr/>
+                    <a:lstStyle/>
+                    <a:p>
+                      <a:pPr indent="0" lvl="0" marL="0" rtl="0" algn="l">
+                        <a:spcBef>
+                          <a:spcPts val="0"/>
+                        </a:spcBef>
+                        <a:spcAft>
+                          <a:spcPts val="0"/>
+                        </a:spcAft>
+                        <a:buNone/>
+                      </a:pPr>
+                      <a:r>
+                        <a:rPr lang="es" sz="1200">
+                          <a:latin typeface="EB Garamond"/>
+                          <a:ea typeface="EB Garamond"/>
+                          <a:cs typeface="EB Garamond"/>
+                          <a:sym typeface="EB Garamond"/>
+                        </a:rPr>
+                        <a:t>Ayudantía 01</a:t>
+                      </a:r>
+                      <a:endParaRPr sz="1200">
+                        <a:latin typeface="EB Garamond"/>
+                        <a:ea typeface="EB Garamond"/>
+                        <a:cs typeface="EB Garamond"/>
+                        <a:sym typeface="EB Garamond"/>
+                      </a:endParaRPr>
+                    </a:p>
+                  </a:txBody>
+                  <a:tcPr marT="91425" marB="91425" marR="91425" marL="91425">
+                    <a:solidFill>
+                      <a:srgbClr val="A2C4C9"/>
+                    </a:solidFill>
+                  </a:tcPr>
+                </a:tc>
+                <a:tc>
+                  <a:txBody>
+                    <a:bodyPr/>
+                    <a:lstStyle/>
+                    <a:p>
+                      <a:pPr indent="0" lvl="0" marL="0" rtl="0" algn="l">
+                        <a:spcBef>
+                          <a:spcPts val="0"/>
+                        </a:spcBef>
+                        <a:spcAft>
+                          <a:spcPts val="0"/>
+                        </a:spcAft>
+                        <a:buNone/>
+                      </a:pPr>
+                      <a:r>
+                        <a:rPr lang="es" sz="1200">
+                          <a:latin typeface="EB Garamond"/>
+                          <a:ea typeface="EB Garamond"/>
+                          <a:cs typeface="EB Garamond"/>
+                          <a:sym typeface="EB Garamond"/>
+                        </a:rPr>
+                        <a:t>Online</a:t>
+                      </a:r>
+                      <a:endParaRPr sz="1200">
+                        <a:latin typeface="EB Garamond"/>
+                        <a:ea typeface="EB Garamond"/>
+                        <a:cs typeface="EB Garamond"/>
+                        <a:sym typeface="EB Garamond"/>
+                      </a:endParaRPr>
+                    </a:p>
+                  </a:txBody>
+                  <a:tcPr marT="91425" marB="91425" marR="91425" marL="91425">
+                    <a:solidFill>
+                      <a:srgbClr val="A2C4C9"/>
+                    </a:solidFill>
+                  </a:tcPr>
+                </a:tc>
+              </a:tr>
+              <a:tr h="212150">
+                <a:tc>
+                  <a:txBody>
+                    <a:bodyPr/>
+                    <a:lstStyle/>
+                    <a:p>
+                      <a:pPr indent="0" lvl="0" marL="0" rtl="0" algn="l">
+                        <a:spcBef>
+                          <a:spcPts val="0"/>
+                        </a:spcBef>
+                        <a:spcAft>
+                          <a:spcPts val="0"/>
+                        </a:spcAft>
+                        <a:buNone/>
+                      </a:pPr>
+                      <a:r>
+                        <a:rPr lang="es" sz="1200">
+                          <a:latin typeface="EB Garamond"/>
+                          <a:ea typeface="EB Garamond"/>
+                          <a:cs typeface="EB Garamond"/>
+                          <a:sym typeface="EB Garamond"/>
+                        </a:rPr>
+                        <a:t>Jueves 28/05</a:t>
+                      </a:r>
+                      <a:endParaRPr sz="1200">
+                        <a:latin typeface="EB Garamond"/>
+                        <a:ea typeface="EB Garamond"/>
+                        <a:cs typeface="EB Garamond"/>
+                        <a:sym typeface="EB Garamond"/>
+                      </a:endParaRPr>
+                    </a:p>
+                  </a:txBody>
+                  <a:tcPr marT="91425" marB="91425" marR="91425" marL="91425">
+                    <a:solidFill>
+                      <a:srgbClr val="D0E0E3"/>
+                    </a:solidFill>
+                  </a:tcPr>
+                </a:tc>
+                <a:tc>
+                  <a:txBody>
+                    <a:bodyPr/>
+                    <a:lstStyle/>
+                    <a:p>
+                      <a:pPr indent="0" lvl="0" marL="0" rtl="0" algn="l">
+                        <a:spcBef>
+                          <a:spcPts val="0"/>
+                        </a:spcBef>
+                        <a:spcAft>
+                          <a:spcPts val="0"/>
+                        </a:spcAft>
+                        <a:buNone/>
+                      </a:pPr>
+                      <a:r>
+                        <a:rPr lang="es" sz="1200">
+                          <a:latin typeface="EB Garamond"/>
+                          <a:ea typeface="EB Garamond"/>
+                          <a:cs typeface="EB Garamond"/>
+                          <a:sym typeface="EB Garamond"/>
+                        </a:rPr>
+                        <a:t>Clase 05</a:t>
+                      </a:r>
+                      <a:endParaRPr sz="1200">
+                        <a:latin typeface="EB Garamond"/>
+                        <a:ea typeface="EB Garamond"/>
+                        <a:cs typeface="EB Garamond"/>
+                        <a:sym typeface="EB Garamond"/>
+                      </a:endParaRPr>
+                    </a:p>
+                  </a:txBody>
+                  <a:tcPr marT="91425" marB="91425" marR="91425" marL="91425">
+                    <a:solidFill>
+                      <a:srgbClr val="D0E0E3"/>
+                    </a:solidFill>
+                  </a:tcPr>
+                </a:tc>
+                <a:tc>
+                  <a:txBody>
+                    <a:bodyPr/>
+                    <a:lstStyle/>
+                    <a:p>
+                      <a:pPr indent="0" lvl="0" marL="0" rtl="0" algn="l">
+                        <a:spcBef>
+                          <a:spcPts val="0"/>
+                        </a:spcBef>
+                        <a:spcAft>
+                          <a:spcPts val="0"/>
+                        </a:spcAft>
+                        <a:buNone/>
+                      </a:pPr>
+                      <a:r>
+                        <a:rPr lang="es" sz="1200">
+                          <a:latin typeface="EB Garamond"/>
+                          <a:ea typeface="EB Garamond"/>
+                          <a:cs typeface="EB Garamond"/>
+                          <a:sym typeface="EB Garamond"/>
+                        </a:rPr>
+                        <a:t>Online</a:t>
+                      </a:r>
+                      <a:endParaRPr sz="1200">
+                        <a:latin typeface="EB Garamond"/>
+                        <a:ea typeface="EB Garamond"/>
+                        <a:cs typeface="EB Garamond"/>
+                        <a:sym typeface="EB Garamond"/>
+                      </a:endParaRPr>
+                    </a:p>
+                  </a:txBody>
+                  <a:tcPr marT="91425" marB="91425" marR="91425" marL="91425">
+                    <a:solidFill>
+                      <a:srgbClr val="D0E0E3"/>
+                    </a:solidFill>
+                  </a:tcPr>
+                </a:tc>
+              </a:tr>
+              <a:tr h="212150">
+                <a:tc>
+                  <a:txBody>
+                    <a:bodyPr/>
+                    <a:lstStyle/>
+                    <a:p>
+                      <a:pPr indent="0" lvl="0" marL="0" rtl="0" algn="l">
+                        <a:spcBef>
+                          <a:spcPts val="0"/>
+                        </a:spcBef>
+                        <a:spcAft>
+                          <a:spcPts val="0"/>
+                        </a:spcAft>
+                        <a:buNone/>
+                      </a:pPr>
+                      <a:r>
+                        <a:rPr lang="es" sz="1200">
+                          <a:latin typeface="EB Garamond"/>
+                          <a:ea typeface="EB Garamond"/>
+                          <a:cs typeface="EB Garamond"/>
+                          <a:sym typeface="EB Garamond"/>
+                        </a:rPr>
+                        <a:t>Lunes 01/06</a:t>
+                      </a:r>
+                      <a:endParaRPr sz="1200">
+                        <a:latin typeface="EB Garamond"/>
+                        <a:ea typeface="EB Garamond"/>
+                        <a:cs typeface="EB Garamond"/>
+                        <a:sym typeface="EB Garamond"/>
+                      </a:endParaRPr>
+                    </a:p>
+                  </a:txBody>
+                  <a:tcPr marT="91425" marB="91425" marR="91425" marL="91425">
+                    <a:solidFill>
+                      <a:srgbClr val="A2C4C9"/>
+                    </a:solidFill>
+                  </a:tcPr>
+                </a:tc>
+                <a:tc>
+                  <a:txBody>
+                    <a:bodyPr/>
+                    <a:lstStyle/>
+                    <a:p>
+                      <a:pPr indent="0" lvl="0" marL="0" rtl="0" algn="l">
+                        <a:spcBef>
+                          <a:spcPts val="0"/>
+                        </a:spcBef>
+                        <a:spcAft>
+                          <a:spcPts val="0"/>
+                        </a:spcAft>
+                        <a:buNone/>
+                      </a:pPr>
+                      <a:r>
+                        <a:rPr lang="es" sz="1200">
+                          <a:latin typeface="EB Garamond"/>
+                          <a:ea typeface="EB Garamond"/>
+                          <a:cs typeface="EB Garamond"/>
+                          <a:sym typeface="EB Garamond"/>
+                        </a:rPr>
+                        <a:t>Ayudantía 02</a:t>
+                      </a:r>
+                      <a:endParaRPr sz="1200">
+                        <a:latin typeface="EB Garamond"/>
+                        <a:ea typeface="EB Garamond"/>
+                        <a:cs typeface="EB Garamond"/>
+                        <a:sym typeface="EB Garamond"/>
+                      </a:endParaRPr>
+                    </a:p>
+                  </a:txBody>
+                  <a:tcPr marT="91425" marB="91425" marR="91425" marL="91425">
+                    <a:solidFill>
+                      <a:srgbClr val="A2C4C9"/>
+                    </a:solidFill>
+                  </a:tcPr>
+                </a:tc>
+                <a:tc>
+                  <a:txBody>
+                    <a:bodyPr/>
+                    <a:lstStyle/>
+                    <a:p>
+                      <a:pPr indent="0" lvl="0" marL="0" rtl="0" algn="l">
+                        <a:spcBef>
+                          <a:spcPts val="0"/>
+                        </a:spcBef>
+                        <a:spcAft>
+                          <a:spcPts val="0"/>
+                        </a:spcAft>
+                        <a:buNone/>
+                      </a:pPr>
+                      <a:r>
+                        <a:rPr lang="es" sz="1200">
+                          <a:latin typeface="EB Garamond"/>
+                          <a:ea typeface="EB Garamond"/>
+                          <a:cs typeface="EB Garamond"/>
+                          <a:sym typeface="EB Garamond"/>
+                        </a:rPr>
+                        <a:t>Online</a:t>
+                      </a:r>
+                      <a:endParaRPr sz="1200">
+                        <a:latin typeface="EB Garamond"/>
+                        <a:ea typeface="EB Garamond"/>
+                        <a:cs typeface="EB Garamond"/>
+                        <a:sym typeface="EB Garamond"/>
+                      </a:endParaRPr>
+                    </a:p>
+                  </a:txBody>
+                  <a:tcPr marT="91425" marB="91425" marR="91425" marL="91425">
+                    <a:solidFill>
+                      <a:srgbClr val="A2C4C9"/>
+                    </a:solidFill>
+                  </a:tcPr>
+                </a:tc>
+              </a:tr>
+            </a:tbl>
+          </a:graphicData>
+        </a:graphic>
+      </p:graphicFrame>
     </p:spTree>
   </p:cSld>
   <p:clrMapOvr>
@@ -10010,7 +10491,7 @@
   <p:cSld>
     <p:spTree>
       <p:nvGrpSpPr>
-        <p:cNvPr id="99" name="Shape 99"/>
+        <p:cNvPr id="100" name="Shape 100"/>
         <p:cNvGrpSpPr/>
         <p:nvPr/>
       </p:nvGrpSpPr>
@@ -10024,7 +10505,7 @@
       </p:grpSpPr>
       <p:sp>
         <p:nvSpPr>
-          <p:cNvPr id="100" name="Google Shape;100;p20"/>
+          <p:cNvPr id="101" name="Google Shape;101;p20"/>
           <p:cNvSpPr txBox="1"/>
           <p:nvPr>
             <p:ph type="title"/>
@@ -10056,7 +10537,7 @@
             </a:pPr>
             <a:r>
               <a:rPr lang="es"/>
-              <a:t>Metodología</a:t>
+              <a:t>Materiales</a:t>
             </a:r>
             <a:endParaRPr/>
           </a:p>
@@ -10064,7 +10545,7 @@
       </p:sp>
       <p:sp>
         <p:nvSpPr>
-          <p:cNvPr id="101" name="Google Shape;101;p20"/>
+          <p:cNvPr id="102" name="Google Shape;102;p20"/>
           <p:cNvSpPr txBox="1"/>
           <p:nvPr>
             <p:ph idx="1" type="body"/>
@@ -10073,7 +10554,7 @@
         <p:spPr>
           <a:xfrm>
             <a:off x="311700" y="1152475"/>
-            <a:ext cx="8520600" cy="3416400"/>
+            <a:ext cx="8520600" cy="957900"/>
           </a:xfrm>
           <a:prstGeom prst="rect">
             <a:avLst/>
@@ -10096,7 +10577,19 @@
             </a:pPr>
             <a:r>
               <a:rPr lang="es"/>
-              <a:t>Todo el material de la asignatura se encontrará disponible en el sitio web del curso: </a:t>
+              <a:t>Todo el material de la asignatura se encontrará disponible en el </a:t>
+            </a:r>
+            <a:r>
+              <a:rPr b="1" lang="es">
+                <a:highlight>
+                  <a:srgbClr val="A2C4C9"/>
+                </a:highlight>
+              </a:rPr>
+              <a:t>sitio web del curso</a:t>
+            </a:r>
+            <a:r>
+              <a:rPr lang="es"/>
+              <a:t>: </a:t>
             </a:r>
             <a:endParaRPr/>
           </a:p>
@@ -10106,7 +10599,7 @@
                 <a:spcPts val="1200"/>
               </a:spcBef>
               <a:spcAft>
-                <a:spcPts val="0"/>
+                <a:spcPts val="1200"/>
               </a:spcAft>
               <a:buNone/>
             </a:pPr>
@@ -10117,37 +10610,7 @@
                 </a:solidFill>
                 <a:hlinkClick r:id="rId3"/>
               </a:rPr>
-              <a:t>https://udp-visualizacion-datos-r.netlify.app/</a:t>
-            </a:r>
-            <a:endParaRPr/>
-          </a:p>
-          <a:p>
-            <a:pPr indent="0" lvl="0" marL="0" rtl="0" algn="ctr">
-              <a:spcBef>
-                <a:spcPts val="1200"/>
-              </a:spcBef>
-              <a:spcAft>
-                <a:spcPts val="0"/>
-              </a:spcAft>
-              <a:buNone/>
-            </a:pPr>
-            <a:r>
-              <a:t/>
-            </a:r>
-            <a:endParaRPr/>
-          </a:p>
-          <a:p>
-            <a:pPr indent="0" lvl="0" marL="0" rtl="0" algn="l">
-              <a:spcBef>
-                <a:spcPts val="1200"/>
-              </a:spcBef>
-              <a:spcAft>
-                <a:spcPts val="1200"/>
-              </a:spcAft>
-              <a:buNone/>
-            </a:pPr>
-            <a:r>
-              <a:t/>
+              <a:t>https://udp-visualizacion-datos-r.netlify.app</a:t>
             </a:r>
             <a:endParaRPr/>
           </a:p>
@@ -10155,21 +10618,22 @@
       </p:sp>
       <p:pic>
         <p:nvPicPr>
-          <p:cNvPr id="102" name="Google Shape;102;p20"/>
+          <p:cNvPr id="103" name="Google Shape;103;p20"/>
           <p:cNvPicPr preferRelativeResize="0"/>
           <p:nvPr/>
         </p:nvPicPr>
-        <p:blipFill rotWithShape="1">
+        <p:blipFill>
           <a:blip r:embed="rId4">
             <a:alphaModFix/>
           </a:blip>
-          <a:srcRect b="2401" l="1526" r="0" t="0"/>
-          <a:stretch/>
+          <a:stretch>
+            <a:fillRect/>
+          </a:stretch>
         </p:blipFill>
         <p:spPr>
           <a:xfrm>
-            <a:off x="1430837" y="2118500"/>
-            <a:ext cx="6896876" cy="2851301"/>
+            <a:off x="1961100" y="2154200"/>
+            <a:ext cx="5221801" cy="2728326"/>
           </a:xfrm>
           <a:prstGeom prst="rect">
             <a:avLst/>
@@ -10193,7 +10657,7 @@
   <p:cSld>
     <p:spTree>
       <p:nvGrpSpPr>
-        <p:cNvPr id="106" name="Shape 106"/>
+        <p:cNvPr id="107" name="Shape 107"/>
         <p:cNvGrpSpPr/>
         <p:nvPr/>
       </p:nvGrpSpPr>
@@ -10207,7 +10671,7 @@
       </p:grpSpPr>
       <p:sp>
         <p:nvSpPr>
-          <p:cNvPr id="107" name="Google Shape;107;p21"/>
+          <p:cNvPr id="108" name="Google Shape;108;p21"/>
           <p:cNvSpPr txBox="1"/>
           <p:nvPr>
             <p:ph type="title"/>
@@ -10251,7 +10715,7 @@
       </p:sp>
       <p:sp>
         <p:nvSpPr>
-          <p:cNvPr id="108" name="Google Shape;108;p21"/>
+          <p:cNvPr id="109" name="Google Shape;109;p21"/>
           <p:cNvSpPr txBox="1"/>
           <p:nvPr>
             <p:ph idx="1" type="body"/>
@@ -10259,7 +10723,7 @@
         </p:nvSpPr>
         <p:spPr>
           <a:xfrm>
-            <a:off x="274200" y="3466325"/>
+            <a:off x="342050" y="1505275"/>
             <a:ext cx="8520600" cy="1498800"/>
           </a:xfrm>
           <a:prstGeom prst="rect">
@@ -10282,58 +10746,6 @@
               <a:spcAft>
                 <a:spcPts val="0"/>
               </a:spcAft>
-              <a:buNone/>
-            </a:pPr>
-            <a:r>
-              <a:t/>
-            </a:r>
-            <a:endParaRPr sz="1400">
-              <a:solidFill>
-                <a:schemeClr val="dk1"/>
-              </a:solidFill>
-              <a:latin typeface="EB Garamond"/>
-              <a:ea typeface="EB Garamond"/>
-              <a:cs typeface="EB Garamond"/>
-              <a:sym typeface="EB Garamond"/>
-            </a:endParaRPr>
-          </a:p>
-          <a:p>
-            <a:pPr indent="0" lvl="0" marL="0" rtl="0" algn="l">
-              <a:lnSpc>
-                <a:spcPct val="100000"/>
-              </a:lnSpc>
-              <a:spcBef>
-                <a:spcPts val="0"/>
-              </a:spcBef>
-              <a:spcAft>
-                <a:spcPts val="0"/>
-              </a:spcAft>
-              <a:buNone/>
-            </a:pPr>
-            <a:r>
-              <a:t/>
-            </a:r>
-            <a:endParaRPr sz="1400">
-              <a:solidFill>
-                <a:schemeClr val="dk1"/>
-              </a:solidFill>
-              <a:latin typeface="EB Garamond"/>
-              <a:ea typeface="EB Garamond"/>
-              <a:cs typeface="EB Garamond"/>
-              <a:sym typeface="EB Garamond"/>
-            </a:endParaRPr>
-          </a:p>
-          <a:p>
-            <a:pPr indent="0" lvl="0" marL="0" rtl="0" algn="l">
-              <a:lnSpc>
-                <a:spcPct val="100000"/>
-              </a:lnSpc>
-              <a:spcBef>
-                <a:spcPts val="0"/>
-              </a:spcBef>
-              <a:spcAft>
-                <a:spcPts val="0"/>
-              </a:spcAft>
               <a:buClr>
                 <a:schemeClr val="dk1"/>
               </a:buClr>
@@ -10342,113 +10754,22 @@
               <a:buNone/>
             </a:pPr>
             <a:r>
-              <a:t/>
-            </a:r>
-            <a:endParaRPr sz="1400">
-              <a:solidFill>
-                <a:schemeClr val="dk1"/>
-              </a:solidFill>
-              <a:latin typeface="EB Garamond"/>
-              <a:ea typeface="EB Garamond"/>
-              <a:cs typeface="EB Garamond"/>
-              <a:sym typeface="EB Garamond"/>
-            </a:endParaRPr>
-          </a:p>
-          <a:p>
-            <a:pPr indent="0" lvl="0" marL="0" rtl="0" algn="l">
-              <a:lnSpc>
-                <a:spcPct val="100000"/>
-              </a:lnSpc>
-              <a:spcBef>
-                <a:spcPts val="0"/>
-              </a:spcBef>
-              <a:spcAft>
-                <a:spcPts val="0"/>
-              </a:spcAft>
-              <a:buNone/>
-            </a:pPr>
-            <a:r>
-              <a:rPr lang="es" sz="1300">
-                <a:latin typeface="EB Garamond"/>
-                <a:ea typeface="EB Garamond"/>
-                <a:cs typeface="EB Garamond"/>
-                <a:sym typeface="EB Garamond"/>
+              <a:rPr lang="es"/>
+              <a:t>Se realizará un </a:t>
+            </a:r>
+            <a:r>
+              <a:rPr b="1" lang="es">
+                <a:highlight>
+                  <a:srgbClr val="A2C4C9"/>
+                </a:highlight>
               </a:rPr>
-              <a:t>* </a:t>
-            </a:r>
-            <a:r>
-              <a:rPr lang="es" sz="1300">
-                <a:latin typeface="EB Garamond"/>
-                <a:ea typeface="EB Garamond"/>
-                <a:cs typeface="EB Garamond"/>
-                <a:sym typeface="EB Garamond"/>
-              </a:rPr>
-              <a:t>Para poder aprobar el curso se requiere cumplir una asistencia mínima de 75%.</a:t>
-            </a:r>
-            <a:endParaRPr sz="1300">
-              <a:latin typeface="EB Garamond"/>
-              <a:ea typeface="EB Garamond"/>
-              <a:cs typeface="EB Garamond"/>
-              <a:sym typeface="EB Garamond"/>
-            </a:endParaRPr>
-          </a:p>
-          <a:p>
-            <a:pPr indent="0" lvl="0" marL="0" rtl="0" algn="l">
-              <a:lnSpc>
-                <a:spcPct val="100000"/>
-              </a:lnSpc>
-              <a:spcBef>
-                <a:spcPts val="0"/>
-              </a:spcBef>
-              <a:spcAft>
-                <a:spcPts val="0"/>
-              </a:spcAft>
-              <a:buNone/>
-            </a:pPr>
-            <a:r>
-              <a:rPr lang="es" sz="1300">
-                <a:latin typeface="EB Garamond"/>
-                <a:ea typeface="EB Garamond"/>
-                <a:cs typeface="EB Garamond"/>
-                <a:sym typeface="EB Garamond"/>
-              </a:rPr>
-              <a:t>* Posibilidad de eximirse del examen con nota 5.5 o superior (Nota de presentación a examen = P1*0.3 + P2*0.3+TP*0.1+TI*0.3).</a:t>
-            </a:r>
-            <a:endParaRPr sz="1300">
-              <a:latin typeface="EB Garamond"/>
-              <a:ea typeface="EB Garamond"/>
-              <a:cs typeface="EB Garamond"/>
-              <a:sym typeface="EB Garamond"/>
-            </a:endParaRPr>
-          </a:p>
-          <a:p>
-            <a:pPr indent="0" lvl="0" marL="0" rtl="0" algn="l">
-              <a:lnSpc>
-                <a:spcPct val="100000"/>
-              </a:lnSpc>
-              <a:spcBef>
-                <a:spcPts val="0"/>
-              </a:spcBef>
-              <a:spcAft>
-                <a:spcPts val="0"/>
-              </a:spcAft>
-              <a:buClr>
-                <a:schemeClr val="dk1"/>
-              </a:buClr>
-              <a:buSzPts val="1100"/>
-              <a:buFont typeface="Arial"/>
-              <a:buNone/>
-            </a:pPr>
-            <a:r>
-              <a:rPr lang="es" sz="1300">
-                <a:latin typeface="EB Garamond"/>
-                <a:ea typeface="EB Garamond"/>
-                <a:cs typeface="EB Garamond"/>
-                <a:sym typeface="EB Garamond"/>
-              </a:rPr>
-              <a:t>* Examen reprobatorio (es decir, se debe obtener nota igual o superior a 4.0)</a:t>
-            </a:r>
-            <a:endParaRPr sz="1300">
+              <a:t>reporte de investigación</a:t>
+            </a:r>
+            <a:r>
+              <a:rPr lang="es"/>
+              <a:t> breve con dos entregas:</a:t>
+            </a:r>
+            <a:endParaRPr>
               <a:latin typeface="EB Garamond"/>
               <a:ea typeface="EB Garamond"/>
               <a:cs typeface="EB Garamond"/>
@@ -10459,12 +10780,12 @@
       </p:sp>
       <p:graphicFrame>
         <p:nvGraphicFramePr>
-          <p:cNvPr id="109" name="Google Shape;109;p21"/>
+          <p:cNvPr id="110" name="Google Shape;110;p21"/>
           <p:cNvGraphicFramePr/>
           <p:nvPr/>
         </p:nvGraphicFramePr>
         <p:xfrm>
-          <a:off x="1106500" y="1485325"/>
+          <a:off x="620275" y="2238525"/>
           <a:ext cx="3000000" cy="3000000"/>
         </p:xfrm>
         <a:graphic>
@@ -10472,13 +10793,13 @@
             <a:tbl>
               <a:tblPr>
                 <a:noFill/>
-                <a:tableStyleId>{677E3E97-7166-4A23-BB2A-B2715022EAEB}</a:tableStyleId>
+                <a:tableStyleId>{69515D36-6FF7-48D5-A226-D6F2A6FE5446}</a:tableStyleId>
               </a:tblPr>
               <a:tblGrid>
-                <a:gridCol w="1141025"/>
-                <a:gridCol w="1188725"/>
-                <a:gridCol w="2663400"/>
-                <a:gridCol w="1937825"/>
+                <a:gridCol w="1124275"/>
+                <a:gridCol w="1297200"/>
+                <a:gridCol w="3269725"/>
+                <a:gridCol w="1963475"/>
               </a:tblGrid>
               <a:tr h="381000">
                 <a:tc>
@@ -10679,19 +11000,7 @@
                           <a:cs typeface="EB Garamond"/>
                           <a:sym typeface="EB Garamond"/>
                         </a:rPr>
-                        <a:t>30</a:t>
-                      </a:r>
-                      <a:r>
-                        <a:rPr lang="es">
-                          <a:solidFill>
-                            <a:schemeClr val="dk1"/>
-                          </a:solidFill>
-                          <a:latin typeface="EB Garamond"/>
-                          <a:ea typeface="EB Garamond"/>
-                          <a:cs typeface="EB Garamond"/>
-                          <a:sym typeface="EB Garamond"/>
-                        </a:rPr>
-                        <a:t>%</a:t>
+                        <a:t>45%</a:t>
                       </a:r>
                       <a:endParaRPr>
                         <a:solidFill>
@@ -10730,7 +11039,7 @@
                           <a:cs typeface="EB Garamond"/>
                           <a:sym typeface="EB Garamond"/>
                         </a:rPr>
-                        <a:t>Lunes 13/04</a:t>
+                        <a:t>Domingo 24/05</a:t>
                       </a:r>
                       <a:endParaRPr>
                         <a:solidFill>
@@ -10769,7 +11078,7 @@
                           <a:cs typeface="EB Garamond"/>
                           <a:sym typeface="EB Garamond"/>
                         </a:rPr>
-                        <a:t>Prueba 1</a:t>
+                        <a:t>Reporte de Investigación - Entrega parcial</a:t>
                       </a:r>
                       <a:endParaRPr>
                         <a:solidFill>
@@ -10808,7 +11117,7 @@
                           <a:cs typeface="EB Garamond"/>
                           <a:sym typeface="EB Garamond"/>
                         </a:rPr>
-                        <a:t>Unidades I y II.</a:t>
+                        <a:t>Unidades I, II y III.</a:t>
                       </a:r>
                       <a:endParaRPr>
                         <a:solidFill>
@@ -10849,7 +11158,7 @@
                           <a:cs typeface="EB Garamond"/>
                           <a:sym typeface="EB Garamond"/>
                         </a:rPr>
-                        <a:t>30%</a:t>
+                        <a:t>55%</a:t>
                       </a:r>
                       <a:endParaRPr>
                         <a:solidFill>
@@ -10888,7 +11197,7 @@
                           <a:cs typeface="EB Garamond"/>
                           <a:sym typeface="EB Garamond"/>
                         </a:rPr>
-                        <a:t>Lunes 25/05</a:t>
+                        <a:t>Domingo 07/06</a:t>
                       </a:r>
                       <a:endParaRPr>
                         <a:solidFill>
@@ -10927,7 +11236,19 @@
                           <a:cs typeface="EB Garamond"/>
                           <a:sym typeface="EB Garamond"/>
                         </a:rPr>
-                        <a:t>Prueba 2</a:t>
+                        <a:t>Reporte de Investigación - </a:t>
+                      </a:r>
+                      <a:r>
+                        <a:rPr lang="es">
+                          <a:solidFill>
+                            <a:schemeClr val="dk1"/>
+                          </a:solidFill>
+                          <a:latin typeface="EB Garamond"/>
+                          <a:ea typeface="EB Garamond"/>
+                          <a:cs typeface="EB Garamond"/>
+                          <a:sym typeface="EB Garamond"/>
+                        </a:rPr>
+                        <a:t>Entrega final</a:t>
                       </a:r>
                       <a:endParaRPr>
                         <a:solidFill>
@@ -10966,499 +11287,7 @@
                           <a:cs typeface="EB Garamond"/>
                           <a:sym typeface="EB Garamond"/>
                         </a:rPr>
-                        <a:t>Unidad III y IV</a:t>
-                      </a:r>
-                      <a:endParaRPr>
-                        <a:solidFill>
-                          <a:schemeClr val="dk1"/>
-                        </a:solidFill>
-                        <a:latin typeface="EB Garamond"/>
-                        <a:ea typeface="EB Garamond"/>
-                        <a:cs typeface="EB Garamond"/>
-                        <a:sym typeface="EB Garamond"/>
-                      </a:endParaRPr>
-                    </a:p>
-                  </a:txBody>
-                  <a:tcPr marT="91425" marB="91425" marR="91425" marL="91425"/>
-                </a:tc>
-              </a:tr>
-              <a:tr h="381000">
-                <a:tc>
-                  <a:txBody>
-                    <a:bodyPr/>
-                    <a:lstStyle/>
-                    <a:p>
-                      <a:pPr indent="0" lvl="0" marL="0" rtl="0" algn="l">
-                        <a:spcBef>
-                          <a:spcPts val="0"/>
-                        </a:spcBef>
-                        <a:spcAft>
-                          <a:spcPts val="0"/>
-                        </a:spcAft>
-                        <a:buNone/>
-                      </a:pPr>
-                      <a:r>
-                        <a:rPr lang="es">
-                          <a:solidFill>
-                            <a:schemeClr val="dk1"/>
-                          </a:solidFill>
-                          <a:latin typeface="EB Garamond"/>
-                          <a:ea typeface="EB Garamond"/>
-                          <a:cs typeface="EB Garamond"/>
-                          <a:sym typeface="EB Garamond"/>
-                        </a:rPr>
-                        <a:t>10%</a:t>
-                      </a:r>
-                      <a:endParaRPr>
-                        <a:solidFill>
-                          <a:schemeClr val="dk1"/>
-                        </a:solidFill>
-                        <a:latin typeface="EB Garamond"/>
-                        <a:ea typeface="EB Garamond"/>
-                        <a:cs typeface="EB Garamond"/>
-                        <a:sym typeface="EB Garamond"/>
-                      </a:endParaRPr>
-                    </a:p>
-                  </a:txBody>
-                  <a:tcPr marT="91425" marB="91425" marR="91425" marL="91425"/>
-                </a:tc>
-                <a:tc>
-                  <a:txBody>
-                    <a:bodyPr/>
-                    <a:lstStyle/>
-                    <a:p>
-                      <a:pPr indent="0" lvl="0" marL="0" rtl="0" algn="l">
-                        <a:spcBef>
-                          <a:spcPts val="0"/>
-                        </a:spcBef>
-                        <a:spcAft>
-                          <a:spcPts val="0"/>
-                        </a:spcAft>
-                        <a:buNone/>
-                      </a:pPr>
-                      <a:r>
-                        <a:rPr lang="es">
-                          <a:solidFill>
-                            <a:schemeClr val="dk1"/>
-                          </a:solidFill>
-                          <a:latin typeface="EB Garamond"/>
-                          <a:ea typeface="EB Garamond"/>
-                          <a:cs typeface="EB Garamond"/>
-                          <a:sym typeface="EB Garamond"/>
-                        </a:rPr>
-                        <a:t>Lunes 15/06</a:t>
-                      </a:r>
-                      <a:endParaRPr>
-                        <a:solidFill>
-                          <a:schemeClr val="dk1"/>
-                        </a:solidFill>
-                        <a:latin typeface="EB Garamond"/>
-                        <a:ea typeface="EB Garamond"/>
-                        <a:cs typeface="EB Garamond"/>
-                        <a:sym typeface="EB Garamond"/>
-                      </a:endParaRPr>
-                    </a:p>
-                  </a:txBody>
-                  <a:tcPr marT="91425" marB="91425" marR="91425" marL="91425"/>
-                </a:tc>
-                <a:tc>
-                  <a:txBody>
-                    <a:bodyPr/>
-                    <a:lstStyle/>
-                    <a:p>
-                      <a:pPr indent="0" lvl="0" marL="0" rtl="0" algn="l">
-                        <a:spcBef>
-                          <a:spcPts val="0"/>
-                        </a:spcBef>
-                        <a:spcAft>
-                          <a:spcPts val="0"/>
-                        </a:spcAft>
-                        <a:buNone/>
-                      </a:pPr>
-                      <a:r>
-                        <a:rPr lang="es">
-                          <a:solidFill>
-                            <a:schemeClr val="dk1"/>
-                          </a:solidFill>
-                          <a:latin typeface="EB Garamond"/>
-                          <a:ea typeface="EB Garamond"/>
-                          <a:cs typeface="EB Garamond"/>
-                          <a:sym typeface="EB Garamond"/>
-                        </a:rPr>
-                        <a:t>Trabajo Presentación</a:t>
-                      </a:r>
-                      <a:endParaRPr>
-                        <a:solidFill>
-                          <a:schemeClr val="dk1"/>
-                        </a:solidFill>
-                        <a:latin typeface="EB Garamond"/>
-                        <a:ea typeface="EB Garamond"/>
-                        <a:cs typeface="EB Garamond"/>
-                        <a:sym typeface="EB Garamond"/>
-                      </a:endParaRPr>
-                    </a:p>
-                  </a:txBody>
-                  <a:tcPr marT="91425" marB="91425" marR="91425" marL="91425"/>
-                </a:tc>
-                <a:tc>
-                  <a:txBody>
-                    <a:bodyPr/>
-                    <a:lstStyle/>
-                    <a:p>
-                      <a:pPr indent="0" lvl="0" marL="0" rtl="0" algn="l">
-                        <a:spcBef>
-                          <a:spcPts val="0"/>
-                        </a:spcBef>
-                        <a:spcAft>
-                          <a:spcPts val="0"/>
-                        </a:spcAft>
-                        <a:buClr>
-                          <a:schemeClr val="dk1"/>
-                        </a:buClr>
-                        <a:buSzPts val="1100"/>
-                        <a:buFont typeface="Arial"/>
-                        <a:buNone/>
-                      </a:pPr>
-                      <a:r>
-                        <a:rPr lang="es">
-                          <a:solidFill>
-                            <a:schemeClr val="dk1"/>
-                          </a:solidFill>
-                          <a:latin typeface="EB Garamond"/>
-                          <a:ea typeface="EB Garamond"/>
-                          <a:cs typeface="EB Garamond"/>
-                          <a:sym typeface="EB Garamond"/>
-                        </a:rPr>
-                        <a:t>Todas las unidades</a:t>
-                      </a:r>
-                      <a:endParaRPr>
-                        <a:solidFill>
-                          <a:schemeClr val="dk1"/>
-                        </a:solidFill>
-                        <a:latin typeface="EB Garamond"/>
-                        <a:ea typeface="EB Garamond"/>
-                        <a:cs typeface="EB Garamond"/>
-                        <a:sym typeface="EB Garamond"/>
-                      </a:endParaRPr>
-                    </a:p>
-                  </a:txBody>
-                  <a:tcPr marT="91425" marB="91425" marR="91425" marL="91425"/>
-                </a:tc>
-              </a:tr>
-              <a:tr h="381000">
-                <a:tc>
-                  <a:txBody>
-                    <a:bodyPr/>
-                    <a:lstStyle/>
-                    <a:p>
-                      <a:pPr indent="0" lvl="0" marL="0" rtl="0" algn="l">
-                        <a:spcBef>
-                          <a:spcPts val="0"/>
-                        </a:spcBef>
-                        <a:spcAft>
-                          <a:spcPts val="0"/>
-                        </a:spcAft>
-                        <a:buNone/>
-                      </a:pPr>
-                      <a:r>
-                        <a:rPr lang="es">
-                          <a:solidFill>
-                            <a:schemeClr val="dk1"/>
-                          </a:solidFill>
-                          <a:latin typeface="EB Garamond"/>
-                          <a:ea typeface="EB Garamond"/>
-                          <a:cs typeface="EB Garamond"/>
-                          <a:sym typeface="EB Garamond"/>
-                        </a:rPr>
-                        <a:t>30%</a:t>
-                      </a:r>
-                      <a:endParaRPr>
-                        <a:solidFill>
-                          <a:schemeClr val="dk1"/>
-                        </a:solidFill>
-                        <a:latin typeface="EB Garamond"/>
-                        <a:ea typeface="EB Garamond"/>
-                        <a:cs typeface="EB Garamond"/>
-                        <a:sym typeface="EB Garamond"/>
-                      </a:endParaRPr>
-                    </a:p>
-                  </a:txBody>
-                  <a:tcPr marT="91425" marB="91425" marR="91425" marL="91425"/>
-                </a:tc>
-                <a:tc>
-                  <a:txBody>
-                    <a:bodyPr/>
-                    <a:lstStyle/>
-                    <a:p>
-                      <a:pPr indent="0" lvl="0" marL="0" rtl="0" algn="l">
-                        <a:spcBef>
-                          <a:spcPts val="0"/>
-                        </a:spcBef>
-                        <a:spcAft>
-                          <a:spcPts val="0"/>
-                        </a:spcAft>
-                        <a:buNone/>
-                      </a:pPr>
-                      <a:r>
-                        <a:rPr lang="es">
-                          <a:solidFill>
-                            <a:schemeClr val="dk1"/>
-                          </a:solidFill>
-                          <a:latin typeface="EB Garamond"/>
-                          <a:ea typeface="EB Garamond"/>
-                          <a:cs typeface="EB Garamond"/>
-                          <a:sym typeface="EB Garamond"/>
-                        </a:rPr>
-                        <a:t>Lunes 22/06</a:t>
-                      </a:r>
-                      <a:endParaRPr>
-                        <a:solidFill>
-                          <a:schemeClr val="dk1"/>
-                        </a:solidFill>
-                        <a:latin typeface="EB Garamond"/>
-                        <a:ea typeface="EB Garamond"/>
-                        <a:cs typeface="EB Garamond"/>
-                        <a:sym typeface="EB Garamond"/>
-                      </a:endParaRPr>
-                    </a:p>
-                  </a:txBody>
-                  <a:tcPr marT="91425" marB="91425" marR="91425" marL="91425"/>
-                </a:tc>
-                <a:tc>
-                  <a:txBody>
-                    <a:bodyPr/>
-                    <a:lstStyle/>
-                    <a:p>
-                      <a:pPr indent="0" lvl="0" marL="0" rtl="0" algn="l">
-                        <a:spcBef>
-                          <a:spcPts val="0"/>
-                        </a:spcBef>
-                        <a:spcAft>
-                          <a:spcPts val="0"/>
-                        </a:spcAft>
-                        <a:buNone/>
-                      </a:pPr>
-                      <a:r>
-                        <a:rPr lang="es">
-                          <a:solidFill>
-                            <a:schemeClr val="dk1"/>
-                          </a:solidFill>
-                          <a:latin typeface="EB Garamond"/>
-                          <a:ea typeface="EB Garamond"/>
-                          <a:cs typeface="EB Garamond"/>
-                          <a:sym typeface="EB Garamond"/>
-                        </a:rPr>
-                        <a:t>Trabajo Informe</a:t>
-                      </a:r>
-                      <a:endParaRPr>
-                        <a:solidFill>
-                          <a:schemeClr val="dk1"/>
-                        </a:solidFill>
-                      </a:endParaRPr>
-                    </a:p>
-                  </a:txBody>
-                  <a:tcPr marT="91425" marB="91425" marR="91425" marL="91425"/>
-                </a:tc>
-                <a:tc>
-                  <a:txBody>
-                    <a:bodyPr/>
-                    <a:lstStyle/>
-                    <a:p>
-                      <a:pPr indent="0" lvl="0" marL="0" rtl="0" algn="l">
-                        <a:spcBef>
-                          <a:spcPts val="0"/>
-                        </a:spcBef>
-                        <a:spcAft>
-                          <a:spcPts val="0"/>
-                        </a:spcAft>
-                        <a:buClr>
-                          <a:schemeClr val="dk1"/>
-                        </a:buClr>
-                        <a:buSzPts val="1100"/>
-                        <a:buFont typeface="Arial"/>
-                        <a:buNone/>
-                      </a:pPr>
-                      <a:r>
-                        <a:rPr lang="es">
-                          <a:solidFill>
-                            <a:schemeClr val="dk1"/>
-                          </a:solidFill>
-                          <a:latin typeface="EB Garamond"/>
-                          <a:ea typeface="EB Garamond"/>
-                          <a:cs typeface="EB Garamond"/>
-                          <a:sym typeface="EB Garamond"/>
-                        </a:rPr>
-                        <a:t>Todas las unidades</a:t>
-                      </a:r>
-                      <a:endParaRPr>
-                        <a:solidFill>
-                          <a:schemeClr val="dk1"/>
-                        </a:solidFill>
-                        <a:latin typeface="EB Garamond"/>
-                        <a:ea typeface="EB Garamond"/>
-                        <a:cs typeface="EB Garamond"/>
-                        <a:sym typeface="EB Garamond"/>
-                      </a:endParaRPr>
-                    </a:p>
-                  </a:txBody>
-                  <a:tcPr marT="91425" marB="91425" marR="91425" marL="91425"/>
-                </a:tc>
-              </a:tr>
-              <a:tr h="381000">
-                <a:tc>
-                  <a:txBody>
-                    <a:bodyPr/>
-                    <a:lstStyle/>
-                    <a:p>
-                      <a:pPr indent="0" lvl="0" marL="0" rtl="0" algn="l">
-                        <a:spcBef>
-                          <a:spcPts val="0"/>
-                        </a:spcBef>
-                        <a:spcAft>
-                          <a:spcPts val="0"/>
-                        </a:spcAft>
-                        <a:buNone/>
-                      </a:pPr>
-                      <a:r>
-                        <a:rPr lang="es">
-                          <a:solidFill>
-                            <a:schemeClr val="dk1"/>
-                          </a:solidFill>
-                          <a:latin typeface="EB Garamond"/>
-                          <a:ea typeface="EB Garamond"/>
-                          <a:cs typeface="EB Garamond"/>
-                          <a:sym typeface="EB Garamond"/>
-                        </a:rPr>
-                        <a:t>3</a:t>
-                      </a:r>
-                      <a:r>
-                        <a:rPr lang="es">
-                          <a:solidFill>
-                            <a:schemeClr val="dk1"/>
-                          </a:solidFill>
-                          <a:latin typeface="EB Garamond"/>
-                          <a:ea typeface="EB Garamond"/>
-                          <a:cs typeface="EB Garamond"/>
-                          <a:sym typeface="EB Garamond"/>
-                        </a:rPr>
-                        <a:t>0%</a:t>
-                      </a:r>
-                      <a:endParaRPr>
-                        <a:solidFill>
-                          <a:schemeClr val="dk1"/>
-                        </a:solidFill>
-                        <a:latin typeface="EB Garamond"/>
-                        <a:ea typeface="EB Garamond"/>
-                        <a:cs typeface="EB Garamond"/>
-                        <a:sym typeface="EB Garamond"/>
-                      </a:endParaRPr>
-                    </a:p>
-                  </a:txBody>
-                  <a:tcPr marT="91425" marB="91425" marR="91425" marL="91425"/>
-                </a:tc>
-                <a:tc>
-                  <a:txBody>
-                    <a:bodyPr/>
-                    <a:lstStyle/>
-                    <a:p>
-                      <a:pPr indent="0" lvl="0" marL="0" rtl="0" algn="l">
-                        <a:spcBef>
-                          <a:spcPts val="0"/>
-                        </a:spcBef>
-                        <a:spcAft>
-                          <a:spcPts val="0"/>
-                        </a:spcAft>
-                        <a:buNone/>
-                      </a:pPr>
-                      <a:r>
-                        <a:rPr lang="es">
-                          <a:solidFill>
-                            <a:schemeClr val="dk1"/>
-                          </a:solidFill>
-                          <a:latin typeface="EB Garamond"/>
-                          <a:ea typeface="EB Garamond"/>
-                          <a:cs typeface="EB Garamond"/>
-                          <a:sym typeface="EB Garamond"/>
-                        </a:rPr>
-                        <a:t>Lunes 15/07</a:t>
-                      </a:r>
-                      <a:endParaRPr>
-                        <a:solidFill>
-                          <a:schemeClr val="dk1"/>
-                        </a:solidFill>
-                        <a:latin typeface="EB Garamond"/>
-                        <a:ea typeface="EB Garamond"/>
-                        <a:cs typeface="EB Garamond"/>
-                        <a:sym typeface="EB Garamond"/>
-                      </a:endParaRPr>
-                    </a:p>
-                  </a:txBody>
-                  <a:tcPr marT="91425" marB="91425" marR="91425" marL="91425"/>
-                </a:tc>
-                <a:tc>
-                  <a:txBody>
-                    <a:bodyPr/>
-                    <a:lstStyle/>
-                    <a:p>
-                      <a:pPr indent="0" lvl="0" marL="0" rtl="0" algn="l">
-                        <a:spcBef>
-                          <a:spcPts val="0"/>
-                        </a:spcBef>
-                        <a:spcAft>
-                          <a:spcPts val="0"/>
-                        </a:spcAft>
-                        <a:buNone/>
-                      </a:pPr>
-                      <a:r>
-                        <a:rPr lang="es">
-                          <a:solidFill>
-                            <a:schemeClr val="dk1"/>
-                          </a:solidFill>
-                          <a:latin typeface="EB Garamond"/>
-                          <a:ea typeface="EB Garamond"/>
-                          <a:cs typeface="EB Garamond"/>
-                          <a:sym typeface="EB Garamond"/>
-                        </a:rPr>
-                        <a:t>Examen</a:t>
-                      </a:r>
-                      <a:endParaRPr>
-                        <a:solidFill>
-                          <a:schemeClr val="dk1"/>
-                        </a:solidFill>
-                        <a:latin typeface="EB Garamond"/>
-                        <a:ea typeface="EB Garamond"/>
-                        <a:cs typeface="EB Garamond"/>
-                        <a:sym typeface="EB Garamond"/>
-                      </a:endParaRPr>
-                    </a:p>
-                  </a:txBody>
-                  <a:tcPr marT="91425" marB="91425" marR="91425" marL="91425"/>
-                </a:tc>
-                <a:tc>
-                  <a:txBody>
-                    <a:bodyPr/>
-                    <a:lstStyle/>
-                    <a:p>
-                      <a:pPr indent="0" lvl="0" marL="0" rtl="0" algn="l">
-                        <a:spcBef>
-                          <a:spcPts val="0"/>
-                        </a:spcBef>
-                        <a:spcAft>
-                          <a:spcPts val="0"/>
-                        </a:spcAft>
-                        <a:buNone/>
-                      </a:pPr>
-                      <a:r>
-                        <a:rPr lang="es">
-                          <a:solidFill>
-                            <a:schemeClr val="dk1"/>
-                          </a:solidFill>
-                          <a:latin typeface="EB Garamond"/>
-                          <a:ea typeface="EB Garamond"/>
-                          <a:cs typeface="EB Garamond"/>
-                          <a:sym typeface="EB Garamond"/>
-                        </a:rPr>
-                        <a:t>Todas las unidades</a:t>
+                        <a:t>Unidades I, II, III y IV</a:t>
                       </a:r>
                       <a:endParaRPr>
                         <a:solidFill>
